--- a/EGX30_Presentation_Final.pptx
+++ b/EGX30_Presentation_Final.pptx
@@ -4,6 +4,9 @@
   <p:sldMasterIdLst>
     <p:sldMasterId id="2147483648" r:id="rId1"/>
   </p:sldMasterIdLst>
+  <p:notesMasterIdLst>
+    <p:notesMasterId r:id="rId12"/>
+  </p:notesMasterIdLst>
   <p:sldIdLst>
     <p:sldId id="256" r:id="rId2"/>
     <p:sldId id="257" r:id="rId3"/>
@@ -16,10 +19,7 @@
     <p:sldId id="264" r:id="rId10"/>
     <p:sldId id="265" r:id="rId11"/>
   </p:sldIdLst>
-  <p:notesMasterIdLst>
-    <p:notesMasterId r:id="rId12"/>
-  </p:notesMasterIdLst>
-  <p:sldSz cx="9144000" cy="5143500"/>
+  <p:sldSz cx="9144000" cy="5143500" type="screen16x9"/>
   <p:notesSz cx="5143500" cy="9144000"/>
   <p:defaultTextStyle>
     <a:lvl1pPr marL="0" algn="l" defTabSz="914400" rtl="0" eaLnBrk="1" latinLnBrk="0" hangingPunct="1">
@@ -113,6 +113,11 @@
       </a:defRPr>
     </a:lvl9pPr>
   </p:defaultTextStyle>
+  <p:extLst>
+    <p:ext uri="{EFAFB233-063F-42B5-8137-9DF3F51BA10A}">
+      <p15:sldGuideLst xmlns:p15="http://schemas.microsoft.com/office/powerpoint/2012/main"/>
+    </p:ext>
+  </p:extLst>
 </p:presentation>
 </file>
 
@@ -138,234 +143,10 @@
           <a:chExt cx="0" cy="0"/>
         </a:xfrm>
       </p:grpSpPr>
-      <p:sp>
-        <p:nvSpPr>
-          <p:cNvPr id="2" name="Header Placeholder 1"/>
-          <p:cNvSpPr>
-            <a:spLocks noGrp="1"/>
-          </p:cNvSpPr>
-          <p:nvPr>
-            <p:ph type="hdr" sz="quarter"/>
-          </p:nvPr>
-        </p:nvSpPr>
-        <p:spPr>
-          <a:xfrm>
-            <a:off x="0" y="0"/>
-            <a:ext cx="2971800" cy="458788"/>
-          </a:xfrm>
-          <a:prstGeom prst="rect">
-            <a:avLst/>
-          </a:prstGeom>
-        </p:spPr>
-        <p:txBody>
-          <a:bodyPr vert="horz" lIns="91440" tIns="45720" rIns="91440" bIns="45720" rtlCol="0"/>
-          <a:lstStyle>
-            <a:lvl1pPr algn="l">
-              <a:defRPr sz="1200"/>
-            </a:lvl1pPr>
-          </a:lstStyle>
-          <a:p>
-            <a:endParaRPr lang="en-US"/>
-          </a:p>
-        </p:txBody>
-      </p:sp>
-      <p:sp>
-        <p:nvSpPr>
-          <p:cNvPr id="3" name="Date Placeholder 2"/>
-          <p:cNvSpPr>
-            <a:spLocks noGrp="1"/>
-          </p:cNvSpPr>
-          <p:nvPr>
-            <p:ph type="dt" idx="1"/>
-          </p:nvPr>
-        </p:nvSpPr>
-        <p:spPr>
-          <a:xfrm>
-            <a:off x="3884613" y="0"/>
-            <a:ext cx="2971800" cy="458788"/>
-          </a:xfrm>
-          <a:prstGeom prst="rect">
-            <a:avLst/>
-          </a:prstGeom>
-        </p:spPr>
-        <p:txBody>
-          <a:bodyPr vert="horz" lIns="91440" tIns="45720" rIns="91440" bIns="45720" rtlCol="0"/>
-          <a:lstStyle>
-            <a:lvl1pPr algn="r">
-              <a:defRPr sz="1200"/>
-            </a:lvl1pPr>
-          </a:lstStyle>
-          <a:p>
-            <a:fld id="{5282F153-3F37-0F45-9E97-73ACFA13230C}" type="datetimeFigureOut">
-              <a:rPr lang="en-US"/>
-              <a:t>7/23/19</a:t>
-            </a:fld>
-            <a:endParaRPr lang="en-US"/>
-          </a:p>
-        </p:txBody>
-      </p:sp>
-      <p:sp>
-        <p:nvSpPr>
-          <p:cNvPr id="4" name="Slide Image Placeholder 3"/>
-          <p:cNvSpPr>
-            <a:spLocks noGrp="1" noRot="1" noChangeAspect="1"/>
-          </p:cNvSpPr>
-          <p:nvPr>
-            <p:ph type="sldImg" idx="2"/>
-          </p:nvPr>
-        </p:nvSpPr>
-        <p:spPr>
-          <a:xfrm>
-            <a:off x="685800" y="1143000"/>
-            <a:ext cx="5486400" cy="3086100"/>
-          </a:xfrm>
-          <a:prstGeom prst="rect">
-            <a:avLst/>
-          </a:prstGeom>
-          <a:noFill/>
-          <a:ln w="12700">
-            <a:solidFill>
-              <a:prstClr val="black"/>
-            </a:solidFill>
-          </a:ln>
-        </p:spPr>
-        <p:txBody>
-          <a:bodyPr vert="horz" lIns="91440" tIns="45720" rIns="91440" bIns="45720" rtlCol="0" anchor="ctr"/>
-          <a:lstStyle/>
-          <a:p>
-            <a:endParaRPr lang="en-US"/>
-          </a:p>
-        </p:txBody>
-      </p:sp>
-      <p:sp>
-        <p:nvSpPr>
-          <p:cNvPr id="5" name="Notes Placeholder 4"/>
-          <p:cNvSpPr>
-            <a:spLocks noGrp="1"/>
-          </p:cNvSpPr>
-          <p:nvPr>
-            <p:ph type="body" sz="quarter" idx="3"/>
-          </p:nvPr>
-        </p:nvSpPr>
-        <p:spPr>
-          <a:xfrm>
-            <a:off x="685800" y="4400550"/>
-            <a:ext cx="5486400" cy="3600450"/>
-          </a:xfrm>
-          <a:prstGeom prst="rect">
-            <a:avLst/>
-          </a:prstGeom>
-        </p:spPr>
-        <p:txBody>
-          <a:bodyPr vert="horz" lIns="91440" tIns="45720" rIns="91440" bIns="45720" rtlCol="0"/>
-          <a:lstStyle/>
-          <a:p>
-            <a:pPr lvl="0"/>
-            <a:r>
-              <a:rPr lang="en-US"/>
-              <a:t>Click to edit Master text styles</a:t>
-            </a:r>
-          </a:p>
-          <a:p>
-            <a:pPr lvl="1"/>
-            <a:r>
-              <a:rPr lang="en-US"/>
-              <a:t>Second level</a:t>
-            </a:r>
-          </a:p>
-          <a:p>
-            <a:pPr lvl="2"/>
-            <a:r>
-              <a:rPr lang="en-US"/>
-              <a:t>Third level</a:t>
-            </a:r>
-          </a:p>
-          <a:p>
-            <a:pPr lvl="3"/>
-            <a:r>
-              <a:rPr lang="en-US"/>
-              <a:t>Fourth level</a:t>
-            </a:r>
-          </a:p>
-          <a:p>
-            <a:pPr lvl="4"/>
-            <a:r>
-              <a:rPr lang="en-US"/>
-              <a:t>Fifth level</a:t>
-            </a:r>
-          </a:p>
-        </p:txBody>
-      </p:sp>
-      <p:sp>
-        <p:nvSpPr>
-          <p:cNvPr id="6" name="Footer Placeholder 5"/>
-          <p:cNvSpPr>
-            <a:spLocks noGrp="1"/>
-          </p:cNvSpPr>
-          <p:nvPr>
-            <p:ph type="ftr" sz="quarter" idx="4"/>
-          </p:nvPr>
-        </p:nvSpPr>
-        <p:spPr>
-          <a:xfrm>
-            <a:off x="0" y="8685213"/>
-            <a:ext cx="2971800" cy="458787"/>
-          </a:xfrm>
-          <a:prstGeom prst="rect">
-            <a:avLst/>
-          </a:prstGeom>
-        </p:spPr>
-        <p:txBody>
-          <a:bodyPr vert="horz" lIns="91440" tIns="45720" rIns="91440" bIns="45720" rtlCol="0" anchor="b"/>
-          <a:lstStyle>
-            <a:lvl1pPr algn="l">
-              <a:defRPr sz="1200"/>
-            </a:lvl1pPr>
-          </a:lstStyle>
-          <a:p>
-            <a:endParaRPr lang="en-US"/>
-          </a:p>
-        </p:txBody>
-      </p:sp>
-      <p:sp>
-        <p:nvSpPr>
-          <p:cNvPr id="7" name="Slide Number Placeholder 6"/>
-          <p:cNvSpPr>
-            <a:spLocks noGrp="1"/>
-          </p:cNvSpPr>
-          <p:nvPr>
-            <p:ph type="sldNum" sz="quarter" idx="5"/>
-          </p:nvPr>
-        </p:nvSpPr>
-        <p:spPr>
-          <a:xfrm>
-            <a:off x="3884613" y="8685213"/>
-            <a:ext cx="2971800" cy="458787"/>
-          </a:xfrm>
-          <a:prstGeom prst="rect">
-            <a:avLst/>
-          </a:prstGeom>
-        </p:spPr>
-        <p:txBody>
-          <a:bodyPr vert="horz" lIns="91440" tIns="45720" rIns="91440" bIns="45720" rtlCol="0" anchor="b"/>
-          <a:lstStyle>
-            <a:lvl1pPr algn="r">
-              <a:defRPr sz="1200"/>
-            </a:lvl1pPr>
-          </a:lstStyle>
-          <a:p>
-            <a:fld id="{CE5E9CC1-C706-0F49-92D6-E571CC5EEA8F}" type="slidenum">
-              <a:rPr lang="en-US"/>
-              <a:t>‹#›</a:t>
-            </a:fld>
-            <a:endParaRPr lang="en-US"/>
-          </a:p>
-        </p:txBody>
-      </p:sp>
     </p:spTree>
     <p:extLst>
       <p:ext uri="{BB962C8B-B14F-4D97-AF65-F5344CB8AC3E}">
-        <p14:creationId xmlns:p14="http://schemas.microsoft.com/office/powerpoint/2010/main" val="1024086991"/>
+        <p14:creationId xmlns:p14="http://schemas.microsoft.com/office/powerpoint/2010/main" val="1297314499"/>
       </p:ext>
     </p:extLst>
   </p:cSld>
@@ -509,10 +290,6 @@
           <a:bodyPr/>
           <a:lstStyle/>
           <a:p>
-            <a:r>
-              <a:rPr lang="en-US" dirty="0"/>
-              <a:t/>
-            </a:r>
             <a:endParaRPr lang="en-US" dirty="0"/>
           </a:p>
         </p:txBody>
@@ -597,10 +374,6 @@
           <a:bodyPr/>
           <a:lstStyle/>
           <a:p>
-            <a:r>
-              <a:rPr lang="en-US" dirty="0"/>
-              <a:t/>
-            </a:r>
             <a:endParaRPr lang="en-US" dirty="0"/>
           </a:p>
         </p:txBody>
@@ -685,10 +458,6 @@
           <a:bodyPr/>
           <a:lstStyle/>
           <a:p>
-            <a:r>
-              <a:rPr lang="en-US" dirty="0"/>
-              <a:t/>
-            </a:r>
             <a:endParaRPr lang="en-US" dirty="0"/>
           </a:p>
         </p:txBody>
@@ -773,10 +542,6 @@
           <a:bodyPr/>
           <a:lstStyle/>
           <a:p>
-            <a:r>
-              <a:rPr lang="en-US" dirty="0"/>
-              <a:t/>
-            </a:r>
             <a:endParaRPr lang="en-US" dirty="0"/>
           </a:p>
         </p:txBody>
@@ -861,10 +626,6 @@
           <a:bodyPr/>
           <a:lstStyle/>
           <a:p>
-            <a:r>
-              <a:rPr lang="en-US" dirty="0"/>
-              <a:t/>
-            </a:r>
             <a:endParaRPr lang="en-US" dirty="0"/>
           </a:p>
         </p:txBody>
@@ -949,10 +710,6 @@
           <a:bodyPr/>
           <a:lstStyle/>
           <a:p>
-            <a:r>
-              <a:rPr lang="en-US" dirty="0"/>
-              <a:t/>
-            </a:r>
             <a:endParaRPr lang="en-US" dirty="0"/>
           </a:p>
         </p:txBody>
@@ -1037,10 +794,6 @@
           <a:bodyPr/>
           <a:lstStyle/>
           <a:p>
-            <a:r>
-              <a:rPr lang="en-US" dirty="0"/>
-              <a:t/>
-            </a:r>
             <a:endParaRPr lang="en-US" dirty="0"/>
           </a:p>
         </p:txBody>
@@ -1125,10 +878,6 @@
           <a:bodyPr/>
           <a:lstStyle/>
           <a:p>
-            <a:r>
-              <a:rPr lang="en-US" dirty="0"/>
-              <a:t/>
-            </a:r>
             <a:endParaRPr lang="en-US" dirty="0"/>
           </a:p>
         </p:txBody>
@@ -1213,10 +962,6 @@
           <a:bodyPr/>
           <a:lstStyle/>
           <a:p>
-            <a:r>
-              <a:rPr lang="en-US" dirty="0"/>
-              <a:t/>
-            </a:r>
             <a:endParaRPr lang="en-US" dirty="0"/>
           </a:p>
         </p:txBody>
@@ -1301,10 +1046,6 @@
           <a:bodyPr/>
           <a:lstStyle/>
           <a:p>
-            <a:r>
-              <a:rPr lang="en-US" dirty="0"/>
-              <a:t/>
-            </a:r>
             <a:endParaRPr lang="en-US" dirty="0"/>
           </a:p>
         </p:txBody>
@@ -1378,6 +1119,11 @@
 <file path=ppt/slideMasters/slideMaster1.xml><?xml version="1.0" encoding="utf-8"?>
 <p:sldMaster xmlns:a="http://schemas.openxmlformats.org/drawingml/2006/main" xmlns:r="http://schemas.openxmlformats.org/officeDocument/2006/relationships" xmlns:p="http://schemas.openxmlformats.org/presentationml/2006/main">
   <p:cSld>
+    <p:bg>
+      <p:bgRef idx="1001">
+        <a:schemeClr val="bg1"/>
+      </p:bgRef>
+    </p:bg>
     <p:spTree>
       <p:nvGrpSpPr>
         <p:cNvPr id="1" name=""/>
@@ -1660,6 +1406,7 @@
         <a:solidFill>
           <a:srgbClr val="0A1628"/>
         </a:solidFill>
+        <a:effectLst/>
       </p:bgPr>
     </p:bg>
     <p:spTree>
@@ -1697,6 +1444,13 @@
           </a:solidFill>
           <a:ln/>
         </p:spPr>
+        <p:txBody>
+          <a:bodyPr/>
+          <a:lstStyle/>
+          <a:p>
+            <a:endParaRPr lang="en-GB"/>
+          </a:p>
+        </p:txBody>
       </p:sp>
       <p:sp>
         <p:nvSpPr>
@@ -1717,6 +1471,13 @@
           </a:solidFill>
           <a:ln/>
         </p:spPr>
+        <p:txBody>
+          <a:bodyPr/>
+          <a:lstStyle/>
+          <a:p>
+            <a:endParaRPr lang="en-GB"/>
+          </a:p>
+        </p:txBody>
       </p:sp>
       <p:sp>
         <p:nvSpPr>
@@ -1739,7 +1500,7 @@
           <a:bodyPr wrap="square" lIns="0" tIns="0" rIns="0" bIns="0" rtlCol="0" anchor="ctr"/>
           <a:lstStyle/>
           <a:p>
-            <a:pPr indent="0" marL="0">
+            <a:pPr marL="0" indent="0">
               <a:buNone/>
             </a:pPr>
             <a:r>
@@ -1778,7 +1539,7 @@
           <a:bodyPr wrap="square" lIns="0" tIns="0" rIns="0" bIns="0" rtlCol="0" anchor="ctr"/>
           <a:lstStyle/>
           <a:p>
-            <a:pPr indent="0" marL="0">
+            <a:pPr marL="0" indent="0">
               <a:buNone/>
             </a:pPr>
             <a:r>
@@ -1817,7 +1578,7 @@
           <a:bodyPr wrap="square" lIns="0" tIns="0" rIns="0" bIns="0" rtlCol="0" anchor="ctr"/>
           <a:lstStyle/>
           <a:p>
-            <a:pPr indent="0" marL="0">
+            <a:pPr marL="0" indent="0">
               <a:buNone/>
             </a:pPr>
             <a:r>
@@ -1856,7 +1617,7 @@
           <a:bodyPr wrap="square" lIns="0" tIns="0" rIns="0" bIns="0" rtlCol="0" anchor="ctr"/>
           <a:lstStyle/>
           <a:p>
-            <a:pPr indent="0" marL="0">
+            <a:pPr marL="0" indent="0">
               <a:buNone/>
             </a:pPr>
             <a:r>
@@ -1895,7 +1656,7 @@
           <a:bodyPr wrap="square" lIns="0" tIns="0" rIns="0" bIns="0" rtlCol="0" anchor="ctr"/>
           <a:lstStyle/>
           <a:p>
-            <a:pPr indent="0" marL="0">
+            <a:pPr marL="0" indent="0">
               <a:buNone/>
             </a:pPr>
             <a:r>
@@ -1934,7 +1695,7 @@
           <a:bodyPr wrap="square" lIns="0" tIns="0" rIns="0" bIns="0" rtlCol="0" anchor="ctr"/>
           <a:lstStyle/>
           <a:p>
-            <a:pPr indent="0" marL="0">
+            <a:pPr marL="0" indent="0">
               <a:buNone/>
             </a:pPr>
             <a:r>
@@ -1946,7 +1707,7 @@
                 <a:ea typeface="Calibri" pitchFamily="34" charset="-122"/>
                 <a:cs typeface="Calibri" pitchFamily="34" charset="-120"/>
               </a:rPr>
-              <a:t>Egypt University of Informatics — C-DE211 Data Analysis — Spring 2026</a:t>
+              <a:t>Egypt University of Informatics - Data Analysis - Spring 2026</a:t>
             </a:r>
             <a:endParaRPr lang="en-US" sz="1000" dirty="0"/>
           </a:p>
@@ -1968,6 +1729,7 @@
         <a:solidFill>
           <a:srgbClr val="0A1628"/>
         </a:solidFill>
+        <a:effectLst/>
       </p:bgPr>
     </p:bg>
     <p:spTree>
@@ -2003,6 +1765,13 @@
           </a:solidFill>
           <a:ln/>
         </p:spPr>
+        <p:txBody>
+          <a:bodyPr/>
+          <a:lstStyle/>
+          <a:p>
+            <a:endParaRPr lang="en-GB"/>
+          </a:p>
+        </p:txBody>
       </p:sp>
       <p:sp>
         <p:nvSpPr>
@@ -2025,7 +1794,7 @@
           <a:bodyPr wrap="square" lIns="0" tIns="0" rIns="0" bIns="0" rtlCol="0" anchor="ctr"/>
           <a:lstStyle/>
           <a:p>
-            <a:pPr indent="0" marL="0">
+            <a:pPr marL="0" indent="0">
               <a:buNone/>
             </a:pPr>
             <a:r>
@@ -2062,6 +1831,13 @@
           </a:solidFill>
           <a:ln/>
         </p:spPr>
+        <p:txBody>
+          <a:bodyPr/>
+          <a:lstStyle/>
+          <a:p>
+            <a:endParaRPr lang="en-GB"/>
+          </a:p>
+        </p:txBody>
       </p:sp>
       <p:sp>
         <p:nvSpPr>
@@ -2082,6 +1858,13 @@
           </a:solidFill>
           <a:ln/>
         </p:spPr>
+        <p:txBody>
+          <a:bodyPr/>
+          <a:lstStyle/>
+          <a:p>
+            <a:endParaRPr lang="en-GB"/>
+          </a:p>
+        </p:txBody>
       </p:sp>
       <p:sp>
         <p:nvSpPr>
@@ -2102,6 +1885,13 @@
           </a:solidFill>
           <a:ln/>
         </p:spPr>
+        <p:txBody>
+          <a:bodyPr/>
+          <a:lstStyle/>
+          <a:p>
+            <a:endParaRPr lang="en-GB"/>
+          </a:p>
+        </p:txBody>
       </p:sp>
       <p:sp>
         <p:nvSpPr>
@@ -2124,7 +1914,7 @@
           <a:bodyPr wrap="square" lIns="0" tIns="0" rIns="0" bIns="0" rtlCol="0" anchor="ctr"/>
           <a:lstStyle/>
           <a:p>
-            <a:pPr algn="ctr" indent="0" marL="0">
+            <a:pPr marL="0" indent="0" algn="ctr">
               <a:buNone/>
             </a:pPr>
             <a:r>
@@ -2163,7 +1953,7 @@
           <a:bodyPr wrap="square" lIns="0" tIns="0" rIns="0" bIns="0" rtlCol="0" anchor="ctr"/>
           <a:lstStyle/>
           <a:p>
-            <a:pPr indent="0" marL="0">
+            <a:pPr marL="0" indent="0">
               <a:buNone/>
             </a:pPr>
             <a:r>
@@ -2202,7 +1992,7 @@
           <a:bodyPr wrap="square" lIns="0" tIns="0" rIns="0" bIns="0" rtlCol="0" anchor="ctr"/>
           <a:lstStyle/>
           <a:p>
-            <a:pPr indent="0" marL="0">
+            <a:pPr marL="0" indent="0">
               <a:buNone/>
             </a:pPr>
             <a:r>
@@ -2214,7 +2004,7 @@
                 <a:ea typeface="Calibri" pitchFamily="34" charset="-122"/>
                 <a:cs typeface="Calibri" pitchFamily="34" charset="-120"/>
               </a:rPr>
-              <a:t>All 5 tested stocks rejected H₀ — their upward trends are statistically significant, not random luck.</a:t>
+              <a:t>All 5 tested stocks rejected H₀, their upward trends are statistically significant, not random luck.</a:t>
             </a:r>
             <a:endParaRPr lang="en-US" sz="1050" dirty="0"/>
           </a:p>
@@ -2239,6 +2029,13 @@
           </a:solidFill>
           <a:ln/>
         </p:spPr>
+        <p:txBody>
+          <a:bodyPr/>
+          <a:lstStyle/>
+          <a:p>
+            <a:endParaRPr lang="en-GB"/>
+          </a:p>
+        </p:txBody>
       </p:sp>
       <p:sp>
         <p:nvSpPr>
@@ -2259,6 +2056,13 @@
           </a:solidFill>
           <a:ln/>
         </p:spPr>
+        <p:txBody>
+          <a:bodyPr/>
+          <a:lstStyle/>
+          <a:p>
+            <a:endParaRPr lang="en-GB"/>
+          </a:p>
+        </p:txBody>
       </p:sp>
       <p:sp>
         <p:nvSpPr>
@@ -2279,6 +2083,13 @@
           </a:solidFill>
           <a:ln/>
         </p:spPr>
+        <p:txBody>
+          <a:bodyPr/>
+          <a:lstStyle/>
+          <a:p>
+            <a:endParaRPr lang="en-GB"/>
+          </a:p>
+        </p:txBody>
       </p:sp>
       <p:sp>
         <p:nvSpPr>
@@ -2301,7 +2112,7 @@
           <a:bodyPr wrap="square" lIns="0" tIns="0" rIns="0" bIns="0" rtlCol="0" anchor="ctr"/>
           <a:lstStyle/>
           <a:p>
-            <a:pPr algn="ctr" indent="0" marL="0">
+            <a:pPr marL="0" indent="0" algn="ctr">
               <a:buNone/>
             </a:pPr>
             <a:r>
@@ -2340,7 +2151,7 @@
           <a:bodyPr wrap="square" lIns="0" tIns="0" rIns="0" bIns="0" rtlCol="0" anchor="ctr"/>
           <a:lstStyle/>
           <a:p>
-            <a:pPr indent="0" marL="0">
+            <a:pPr marL="0" indent="0">
               <a:buNone/>
             </a:pPr>
             <a:r>
@@ -2379,7 +2190,7 @@
           <a:bodyPr wrap="square" lIns="0" tIns="0" rIns="0" bIns="0" rtlCol="0" anchor="ctr"/>
           <a:lstStyle/>
           <a:p>
-            <a:pPr indent="0" marL="0">
+            <a:pPr marL="0" indent="0">
               <a:buNone/>
             </a:pPr>
             <a:r>
@@ -2416,6 +2227,13 @@
           </a:solidFill>
           <a:ln/>
         </p:spPr>
+        <p:txBody>
+          <a:bodyPr/>
+          <a:lstStyle/>
+          <a:p>
+            <a:endParaRPr lang="en-GB"/>
+          </a:p>
+        </p:txBody>
       </p:sp>
       <p:sp>
         <p:nvSpPr>
@@ -2436,6 +2254,13 @@
           </a:solidFill>
           <a:ln/>
         </p:spPr>
+        <p:txBody>
+          <a:bodyPr/>
+          <a:lstStyle/>
+          <a:p>
+            <a:endParaRPr lang="en-GB"/>
+          </a:p>
+        </p:txBody>
       </p:sp>
       <p:sp>
         <p:nvSpPr>
@@ -2456,6 +2281,13 @@
           </a:solidFill>
           <a:ln/>
         </p:spPr>
+        <p:txBody>
+          <a:bodyPr/>
+          <a:lstStyle/>
+          <a:p>
+            <a:endParaRPr lang="en-GB"/>
+          </a:p>
+        </p:txBody>
       </p:sp>
       <p:sp>
         <p:nvSpPr>
@@ -2478,7 +2310,7 @@
           <a:bodyPr wrap="square" lIns="0" tIns="0" rIns="0" bIns="0" rtlCol="0" anchor="ctr"/>
           <a:lstStyle/>
           <a:p>
-            <a:pPr algn="ctr" indent="0" marL="0">
+            <a:pPr marL="0" indent="0" algn="ctr">
               <a:buNone/>
             </a:pPr>
             <a:r>
@@ -2517,7 +2349,7 @@
           <a:bodyPr wrap="square" lIns="0" tIns="0" rIns="0" bIns="0" rtlCol="0" anchor="ctr"/>
           <a:lstStyle/>
           <a:p>
-            <a:pPr indent="0" marL="0">
+            <a:pPr marL="0" indent="0">
               <a:buNone/>
             </a:pPr>
             <a:r>
@@ -2556,7 +2388,7 @@
           <a:bodyPr wrap="square" lIns="0" tIns="0" rIns="0" bIns="0" rtlCol="0" anchor="ctr"/>
           <a:lstStyle/>
           <a:p>
-            <a:pPr indent="0" marL="0">
+            <a:pPr marL="0" indent="0">
               <a:buNone/>
             </a:pPr>
             <a:r>
@@ -2593,6 +2425,13 @@
           </a:solidFill>
           <a:ln/>
         </p:spPr>
+        <p:txBody>
+          <a:bodyPr/>
+          <a:lstStyle/>
+          <a:p>
+            <a:endParaRPr lang="en-GB"/>
+          </a:p>
+        </p:txBody>
       </p:sp>
       <p:sp>
         <p:nvSpPr>
@@ -2613,6 +2452,13 @@
           </a:solidFill>
           <a:ln/>
         </p:spPr>
+        <p:txBody>
+          <a:bodyPr/>
+          <a:lstStyle/>
+          <a:p>
+            <a:endParaRPr lang="en-GB"/>
+          </a:p>
+        </p:txBody>
       </p:sp>
       <p:sp>
         <p:nvSpPr>
@@ -2633,6 +2479,13 @@
           </a:solidFill>
           <a:ln/>
         </p:spPr>
+        <p:txBody>
+          <a:bodyPr/>
+          <a:lstStyle/>
+          <a:p>
+            <a:endParaRPr lang="en-GB"/>
+          </a:p>
+        </p:txBody>
       </p:sp>
       <p:sp>
         <p:nvSpPr>
@@ -2655,7 +2508,7 @@
           <a:bodyPr wrap="square" lIns="0" tIns="0" rIns="0" bIns="0" rtlCol="0" anchor="ctr"/>
           <a:lstStyle/>
           <a:p>
-            <a:pPr algn="ctr" indent="0" marL="0">
+            <a:pPr marL="0" indent="0" algn="ctr">
               <a:buNone/>
             </a:pPr>
             <a:r>
@@ -2694,7 +2547,7 @@
           <a:bodyPr wrap="square" lIns="0" tIns="0" rIns="0" bIns="0" rtlCol="0" anchor="ctr"/>
           <a:lstStyle/>
           <a:p>
-            <a:pPr indent="0" marL="0">
+            <a:pPr marL="0" indent="0">
               <a:buNone/>
             </a:pPr>
             <a:r>
@@ -2733,7 +2586,7 @@
           <a:bodyPr wrap="square" lIns="0" tIns="0" rIns="0" bIns="0" rtlCol="0" anchor="ctr"/>
           <a:lstStyle/>
           <a:p>
-            <a:pPr indent="0" marL="0">
+            <a:pPr marL="0" indent="0">
               <a:buNone/>
             </a:pPr>
             <a:r>
@@ -2759,8 +2612,8 @@
         </p:nvSpPr>
         <p:spPr>
           <a:xfrm>
-            <a:off x="457200" y="4617720"/>
-            <a:ext cx="8229600" cy="320040"/>
+            <a:off x="457200" y="4498848"/>
+            <a:ext cx="8306114" cy="521208"/>
           </a:xfrm>
           <a:prstGeom prst="rect">
             <a:avLst/>
@@ -2772,21 +2625,25 @@
           <a:bodyPr wrap="square" lIns="0" tIns="0" rIns="0" bIns="0" rtlCol="0" anchor="ctr"/>
           <a:lstStyle/>
           <a:p>
-            <a:pPr indent="0" marL="0">
+            <a:pPr marL="0" indent="0">
               <a:buNone/>
             </a:pPr>
             <a:r>
               <a:rPr lang="en-US" sz="1000" i="1" dirty="0">
                 <a:solidFill>
-                  <a:srgbClr val="64748B"/>
+                  <a:schemeClr val="bg1"/>
                 </a:solidFill>
                 <a:latin typeface="Calibri" pitchFamily="34" charset="0"/>
                 <a:ea typeface="Calibri" pitchFamily="34" charset="-122"/>
                 <a:cs typeface="Calibri" pitchFamily="34" charset="-120"/>
               </a:rPr>
-              <a:t>Bottom line: understanding macro events — especially currency policy — matters more than any technical indicator for navigating the Egyptian market.</a:t>
-            </a:r>
-            <a:endParaRPr lang="en-US" sz="1000" dirty="0"/>
+              <a:t>Bottom line: understanding macro events - especially currency policy - matters more than any technical indicator for navigating the Egyptian market.</a:t>
+            </a:r>
+            <a:endParaRPr lang="en-US" sz="1000" dirty="0">
+              <a:solidFill>
+                <a:schemeClr val="bg1"/>
+              </a:solidFill>
+            </a:endParaRPr>
           </a:p>
         </p:txBody>
       </p:sp>
@@ -2806,6 +2663,7 @@
         <a:solidFill>
           <a:srgbClr val="FFFFFF"/>
         </a:solidFill>
+        <a:effectLst/>
       </p:bgPr>
     </p:bg>
     <p:spTree>
@@ -2841,6 +2699,13 @@
           </a:solidFill>
           <a:ln/>
         </p:spPr>
+        <p:txBody>
+          <a:bodyPr/>
+          <a:lstStyle/>
+          <a:p>
+            <a:endParaRPr lang="en-GB"/>
+          </a:p>
+        </p:txBody>
       </p:sp>
       <p:sp>
         <p:nvSpPr>
@@ -2863,7 +2728,7 @@
           <a:bodyPr wrap="square" lIns="0" tIns="0" rIns="0" bIns="0" rtlCol="0" anchor="ctr"/>
           <a:lstStyle/>
           <a:p>
-            <a:pPr indent="0" marL="0">
+            <a:pPr marL="0" indent="0">
               <a:buNone/>
             </a:pPr>
             <a:r>
@@ -2900,13 +2765,20 @@
           </a:solidFill>
           <a:ln/>
           <a:effectLst>
-            <a:outerShdw sx="100000" sy="100000" kx="0" ky="0" algn="bl" rotWithShape="0" blurRad="76200" dist="25400" dir="8100000">
+            <a:outerShdw blurRad="76200" dist="25400" dir="8100000" algn="bl" rotWithShape="0">
               <a:srgbClr val="000000">
                 <a:alpha val="12000"/>
               </a:srgbClr>
             </a:outerShdw>
           </a:effectLst>
         </p:spPr>
+        <p:txBody>
+          <a:bodyPr/>
+          <a:lstStyle/>
+          <a:p>
+            <a:endParaRPr lang="en-GB"/>
+          </a:p>
+        </p:txBody>
       </p:sp>
       <p:sp>
         <p:nvSpPr>
@@ -2927,6 +2799,13 @@
           </a:solidFill>
           <a:ln/>
         </p:spPr>
+        <p:txBody>
+          <a:bodyPr/>
+          <a:lstStyle/>
+          <a:p>
+            <a:endParaRPr lang="en-GB"/>
+          </a:p>
+        </p:txBody>
       </p:sp>
       <p:sp>
         <p:nvSpPr>
@@ -2949,7 +2828,7 @@
           <a:bodyPr wrap="square" lIns="0" tIns="0" rIns="0" bIns="0" rtlCol="0" anchor="ctr"/>
           <a:lstStyle/>
           <a:p>
-            <a:pPr indent="0" marL="0">
+            <a:pPr marL="0" indent="0">
               <a:buNone/>
             </a:pPr>
             <a:r>
@@ -2961,7 +2840,7 @@
                 <a:ea typeface="Calibri" pitchFamily="34" charset="-122"/>
                 <a:cs typeface="Calibri" pitchFamily="34" charset="-120"/>
               </a:rPr>
-              <a:t>Are Egyptian stock prices actually going up, or is it just random noise? And when the pound crashes, does the whole market feel it — or just some sectors?</a:t>
+              <a:t>Are Egyptian stock prices actually going up, or is it just random noise? And when the pound crashes, does the whole market feel it, or just some sectors?</a:t>
             </a:r>
             <a:endParaRPr lang="en-US" sz="1300" dirty="0"/>
           </a:p>
@@ -2986,13 +2865,20 @@
           </a:solidFill>
           <a:ln/>
           <a:effectLst>
-            <a:outerShdw sx="100000" sy="100000" kx="0" ky="0" algn="bl" rotWithShape="0" blurRad="76200" dist="25400" dir="8100000">
+            <a:outerShdw blurRad="76200" dist="25400" dir="8100000" algn="bl" rotWithShape="0">
               <a:srgbClr val="000000">
                 <a:alpha val="12000"/>
               </a:srgbClr>
             </a:outerShdw>
           </a:effectLst>
         </p:spPr>
+        <p:txBody>
+          <a:bodyPr/>
+          <a:lstStyle/>
+          <a:p>
+            <a:endParaRPr lang="en-GB"/>
+          </a:p>
+        </p:txBody>
       </p:sp>
       <p:sp>
         <p:nvSpPr>
@@ -3013,6 +2899,13 @@
           </a:solidFill>
           <a:ln/>
         </p:spPr>
+        <p:txBody>
+          <a:bodyPr/>
+          <a:lstStyle/>
+          <a:p>
+            <a:endParaRPr lang="en-GB"/>
+          </a:p>
+        </p:txBody>
       </p:sp>
       <p:sp>
         <p:nvSpPr>
@@ -3035,7 +2928,7 @@
           <a:bodyPr wrap="square" lIns="0" tIns="0" rIns="0" bIns="0" rtlCol="0" anchor="ctr"/>
           <a:lstStyle/>
           <a:p>
-            <a:pPr indent="0" marL="0">
+            <a:pPr marL="0" indent="0">
               <a:buNone/>
             </a:pPr>
             <a:r>
@@ -3074,7 +2967,7 @@
           <a:bodyPr wrap="square" lIns="0" tIns="0" rIns="0" bIns="0" rtlCol="0" anchor="ctr"/>
           <a:lstStyle/>
           <a:p>
-            <a:pPr indent="0" marL="0">
+            <a:pPr marL="0" indent="0">
               <a:buNone/>
             </a:pPr>
             <a:r>
@@ -3091,7 +2984,7 @@
             <a:endParaRPr lang="en-US" sz="1050" dirty="0"/>
           </a:p>
           <a:p>
-            <a:pPr indent="0" marL="0">
+            <a:pPr marL="0" indent="0">
               <a:buNone/>
             </a:pPr>
             <a:r>
@@ -3108,7 +3001,7 @@
             <a:endParaRPr lang="en-US" sz="1050" dirty="0"/>
           </a:p>
           <a:p>
-            <a:pPr indent="0" marL="0">
+            <a:pPr marL="0" indent="0">
               <a:buNone/>
             </a:pPr>
             <a:r>
@@ -3145,13 +3038,20 @@
           </a:solidFill>
           <a:ln/>
           <a:effectLst>
-            <a:outerShdw sx="100000" sy="100000" kx="0" ky="0" algn="bl" rotWithShape="0" blurRad="76200" dist="25400" dir="8100000">
+            <a:outerShdw blurRad="76200" dist="25400" dir="8100000" algn="bl" rotWithShape="0">
               <a:srgbClr val="000000">
                 <a:alpha val="12000"/>
               </a:srgbClr>
             </a:outerShdw>
           </a:effectLst>
         </p:spPr>
+        <p:txBody>
+          <a:bodyPr/>
+          <a:lstStyle/>
+          <a:p>
+            <a:endParaRPr lang="en-GB"/>
+          </a:p>
+        </p:txBody>
       </p:sp>
       <p:sp>
         <p:nvSpPr>
@@ -3172,6 +3072,13 @@
           </a:solidFill>
           <a:ln/>
         </p:spPr>
+        <p:txBody>
+          <a:bodyPr/>
+          <a:lstStyle/>
+          <a:p>
+            <a:endParaRPr lang="en-GB"/>
+          </a:p>
+        </p:txBody>
       </p:sp>
       <p:sp>
         <p:nvSpPr>
@@ -3194,7 +3101,7 @@
           <a:bodyPr wrap="square" lIns="0" tIns="0" rIns="0" bIns="0" rtlCol="0" anchor="ctr"/>
           <a:lstStyle/>
           <a:p>
-            <a:pPr indent="0" marL="0">
+            <a:pPr marL="0" indent="0">
               <a:buNone/>
             </a:pPr>
             <a:r>
@@ -3233,7 +3140,7 @@
           <a:bodyPr wrap="square" lIns="0" tIns="0" rIns="0" bIns="0" rtlCol="0" anchor="ctr"/>
           <a:lstStyle/>
           <a:p>
-            <a:pPr indent="0" marL="0">
+            <a:pPr marL="0" indent="0">
               <a:buNone/>
             </a:pPr>
             <a:r>
@@ -3250,7 +3157,7 @@
             <a:endParaRPr lang="en-US" sz="1050" dirty="0"/>
           </a:p>
           <a:p>
-            <a:pPr indent="0" marL="0">
+            <a:pPr marL="0" indent="0">
               <a:buNone/>
             </a:pPr>
             <a:r>
@@ -3267,7 +3174,7 @@
             <a:endParaRPr lang="en-US" sz="1050" dirty="0"/>
           </a:p>
           <a:p>
-            <a:pPr indent="0" marL="0">
+            <a:pPr marL="0" indent="0">
               <a:buNone/>
             </a:pPr>
             <a:r>
@@ -3304,13 +3211,20 @@
           </a:solidFill>
           <a:ln/>
           <a:effectLst>
-            <a:outerShdw sx="100000" sy="100000" kx="0" ky="0" algn="bl" rotWithShape="0" blurRad="76200" dist="25400" dir="8100000">
+            <a:outerShdw blurRad="76200" dist="25400" dir="8100000" algn="bl" rotWithShape="0">
               <a:srgbClr val="000000">
                 <a:alpha val="12000"/>
               </a:srgbClr>
             </a:outerShdw>
           </a:effectLst>
         </p:spPr>
+        <p:txBody>
+          <a:bodyPr/>
+          <a:lstStyle/>
+          <a:p>
+            <a:endParaRPr lang="en-GB"/>
+          </a:p>
+        </p:txBody>
       </p:sp>
       <p:sp>
         <p:nvSpPr>
@@ -3331,6 +3245,13 @@
           </a:solidFill>
           <a:ln/>
         </p:spPr>
+        <p:txBody>
+          <a:bodyPr/>
+          <a:lstStyle/>
+          <a:p>
+            <a:endParaRPr lang="en-GB"/>
+          </a:p>
+        </p:txBody>
       </p:sp>
       <p:sp>
         <p:nvSpPr>
@@ -3353,7 +3274,7 @@
           <a:bodyPr wrap="square" lIns="0" tIns="0" rIns="0" bIns="0" rtlCol="0" anchor="ctr"/>
           <a:lstStyle/>
           <a:p>
-            <a:pPr indent="0" marL="0">
+            <a:pPr marL="0" indent="0">
               <a:buNone/>
             </a:pPr>
             <a:r>
@@ -3392,7 +3313,7 @@
           <a:bodyPr wrap="square" lIns="0" tIns="0" rIns="0" bIns="0" rtlCol="0" anchor="ctr"/>
           <a:lstStyle/>
           <a:p>
-            <a:pPr indent="0" marL="0">
+            <a:pPr marL="0" indent="0">
               <a:buNone/>
             </a:pPr>
             <a:r>
@@ -3409,7 +3330,7 @@
             <a:endParaRPr lang="en-US" sz="1050" dirty="0"/>
           </a:p>
           <a:p>
-            <a:pPr indent="0" marL="0">
+            <a:pPr marL="0" indent="0">
               <a:buNone/>
             </a:pPr>
             <a:r>
@@ -3426,7 +3347,7 @@
             <a:endParaRPr lang="en-US" sz="1050" dirty="0"/>
           </a:p>
           <a:p>
-            <a:pPr indent="0" marL="0">
+            <a:pPr marL="0" indent="0">
               <a:buNone/>
             </a:pPr>
             <a:r>
@@ -3465,7 +3386,7 @@
           <a:bodyPr wrap="square" lIns="0" tIns="0" rIns="0" bIns="0" rtlCol="0" anchor="ctr"/>
           <a:lstStyle/>
           <a:p>
-            <a:pPr indent="0" marL="0">
+            <a:pPr marL="0" indent="0">
               <a:buNone/>
             </a:pPr>
             <a:r>
@@ -3506,6 +3427,13 @@
           </a:solidFill>
           <a:ln/>
         </p:spPr>
+        <p:txBody>
+          <a:bodyPr/>
+          <a:lstStyle/>
+          <a:p>
+            <a:endParaRPr lang="en-GB"/>
+          </a:p>
+        </p:txBody>
       </p:sp>
       <p:sp>
         <p:nvSpPr>
@@ -3528,7 +3456,7 @@
           <a:bodyPr wrap="square" lIns="0" tIns="0" rIns="0" bIns="0" rtlCol="0" anchor="ctr"/>
           <a:lstStyle/>
           <a:p>
-            <a:pPr algn="ctr" indent="0" marL="0">
+            <a:pPr marL="0" indent="0" algn="ctr">
               <a:buNone/>
             </a:pPr>
             <a:r>
@@ -3567,7 +3495,7 @@
           <a:bodyPr wrap="square" lIns="0" tIns="0" rIns="0" bIns="0" rtlCol="0" anchor="ctr"/>
           <a:lstStyle/>
           <a:p>
-            <a:pPr algn="ctr" indent="0" marL="0">
+            <a:pPr marL="0" indent="0" algn="ctr">
               <a:buNone/>
             </a:pPr>
             <a:r>
@@ -3605,6 +3533,13 @@
           </a:solidFill>
           <a:ln/>
         </p:spPr>
+        <p:txBody>
+          <a:bodyPr/>
+          <a:lstStyle/>
+          <a:p>
+            <a:endParaRPr lang="en-GB"/>
+          </a:p>
+        </p:txBody>
       </p:sp>
       <p:sp>
         <p:nvSpPr>
@@ -3627,7 +3562,7 @@
           <a:bodyPr wrap="square" lIns="0" tIns="0" rIns="0" bIns="0" rtlCol="0" anchor="ctr"/>
           <a:lstStyle/>
           <a:p>
-            <a:pPr algn="ctr" indent="0" marL="0">
+            <a:pPr marL="0" indent="0" algn="ctr">
               <a:buNone/>
             </a:pPr>
             <a:r>
@@ -3666,7 +3601,7 @@
           <a:bodyPr wrap="square" lIns="0" tIns="0" rIns="0" bIns="0" rtlCol="0" anchor="ctr"/>
           <a:lstStyle/>
           <a:p>
-            <a:pPr algn="ctr" indent="0" marL="0">
+            <a:pPr marL="0" indent="0" algn="ctr">
               <a:buNone/>
             </a:pPr>
             <a:r>
@@ -3704,6 +3639,13 @@
           </a:solidFill>
           <a:ln/>
         </p:spPr>
+        <p:txBody>
+          <a:bodyPr/>
+          <a:lstStyle/>
+          <a:p>
+            <a:endParaRPr lang="en-GB"/>
+          </a:p>
+        </p:txBody>
       </p:sp>
       <p:sp>
         <p:nvSpPr>
@@ -3726,7 +3668,7 @@
           <a:bodyPr wrap="square" lIns="0" tIns="0" rIns="0" bIns="0" rtlCol="0" anchor="ctr"/>
           <a:lstStyle/>
           <a:p>
-            <a:pPr algn="ctr" indent="0" marL="0">
+            <a:pPr marL="0" indent="0" algn="ctr">
               <a:buNone/>
             </a:pPr>
             <a:r>
@@ -3765,7 +3707,7 @@
           <a:bodyPr wrap="square" lIns="0" tIns="0" rIns="0" bIns="0" rtlCol="0" anchor="ctr"/>
           <a:lstStyle/>
           <a:p>
-            <a:pPr algn="ctr" indent="0" marL="0">
+            <a:pPr marL="0" indent="0" algn="ctr">
               <a:buNone/>
             </a:pPr>
             <a:r>
@@ -3803,6 +3745,13 @@
           </a:solidFill>
           <a:ln/>
         </p:spPr>
+        <p:txBody>
+          <a:bodyPr/>
+          <a:lstStyle/>
+          <a:p>
+            <a:endParaRPr lang="en-GB"/>
+          </a:p>
+        </p:txBody>
       </p:sp>
       <p:sp>
         <p:nvSpPr>
@@ -3825,7 +3774,7 @@
           <a:bodyPr wrap="square" lIns="0" tIns="0" rIns="0" bIns="0" rtlCol="0" anchor="ctr"/>
           <a:lstStyle/>
           <a:p>
-            <a:pPr algn="ctr" indent="0" marL="0">
+            <a:pPr marL="0" indent="0" algn="ctr">
               <a:buNone/>
             </a:pPr>
             <a:r>
@@ -3842,7 +3791,7 @@
             <a:endParaRPr lang="en-US" sz="900" dirty="0"/>
           </a:p>
           <a:p>
-            <a:pPr algn="ctr" indent="0" marL="0">
+            <a:pPr marL="0" indent="0" algn="ctr">
               <a:buNone/>
             </a:pPr>
             <a:r>
@@ -3881,7 +3830,7 @@
           <a:bodyPr wrap="square" lIns="0" tIns="0" rIns="0" bIns="0" rtlCol="0" anchor="ctr"/>
           <a:lstStyle/>
           <a:p>
-            <a:pPr algn="ctr" indent="0" marL="0">
+            <a:pPr marL="0" indent="0" algn="ctr">
               <a:buNone/>
             </a:pPr>
             <a:r>
@@ -3919,6 +3868,13 @@
           </a:solidFill>
           <a:ln/>
         </p:spPr>
+        <p:txBody>
+          <a:bodyPr/>
+          <a:lstStyle/>
+          <a:p>
+            <a:endParaRPr lang="en-GB"/>
+          </a:p>
+        </p:txBody>
       </p:sp>
       <p:sp>
         <p:nvSpPr>
@@ -3941,7 +3897,7 @@
           <a:bodyPr wrap="square" lIns="0" tIns="0" rIns="0" bIns="0" rtlCol="0" anchor="ctr"/>
           <a:lstStyle/>
           <a:p>
-            <a:pPr algn="ctr" indent="0" marL="0">
+            <a:pPr marL="0" indent="0" algn="ctr">
               <a:buNone/>
             </a:pPr>
             <a:r>
@@ -3958,7 +3914,7 @@
             <a:endParaRPr lang="en-US" sz="900" dirty="0"/>
           </a:p>
           <a:p>
-            <a:pPr algn="ctr" indent="0" marL="0">
+            <a:pPr marL="0" indent="0" algn="ctr">
               <a:buNone/>
             </a:pPr>
             <a:r>
@@ -3997,7 +3953,7 @@
           <a:bodyPr wrap="square" lIns="0" tIns="0" rIns="0" bIns="0" rtlCol="0" anchor="ctr"/>
           <a:lstStyle/>
           <a:p>
-            <a:pPr algn="ctr" indent="0" marL="0">
+            <a:pPr marL="0" indent="0" algn="ctr">
               <a:buNone/>
             </a:pPr>
             <a:r>
@@ -4035,6 +3991,13 @@
           </a:solidFill>
           <a:ln/>
         </p:spPr>
+        <p:txBody>
+          <a:bodyPr/>
+          <a:lstStyle/>
+          <a:p>
+            <a:endParaRPr lang="en-GB"/>
+          </a:p>
+        </p:txBody>
       </p:sp>
       <p:sp>
         <p:nvSpPr>
@@ -4057,7 +4020,7 @@
           <a:bodyPr wrap="square" lIns="0" tIns="0" rIns="0" bIns="0" rtlCol="0" anchor="ctr"/>
           <a:lstStyle/>
           <a:p>
-            <a:pPr algn="ctr" indent="0" marL="0">
+            <a:pPr marL="0" indent="0" algn="ctr">
               <a:buNone/>
             </a:pPr>
             <a:r>
@@ -4074,7 +4037,7 @@
             <a:endParaRPr lang="en-US" sz="900" dirty="0"/>
           </a:p>
           <a:p>
-            <a:pPr algn="ctr" indent="0" marL="0">
+            <a:pPr marL="0" indent="0" algn="ctr">
               <a:buNone/>
             </a:pPr>
             <a:r>
@@ -4108,6 +4071,7 @@
         <a:solidFill>
           <a:srgbClr val="FFFFFF"/>
         </a:solidFill>
+        <a:effectLst/>
       </p:bgPr>
     </p:bg>
     <p:spTree>
@@ -4143,6 +4107,13 @@
           </a:solidFill>
           <a:ln/>
         </p:spPr>
+        <p:txBody>
+          <a:bodyPr/>
+          <a:lstStyle/>
+          <a:p>
+            <a:endParaRPr lang="en-GB"/>
+          </a:p>
+        </p:txBody>
       </p:sp>
       <p:sp>
         <p:nvSpPr>
@@ -4165,7 +4136,7 @@
           <a:bodyPr wrap="square" lIns="0" tIns="0" rIns="0" bIns="0" rtlCol="0" anchor="ctr"/>
           <a:lstStyle/>
           <a:p>
-            <a:pPr indent="0" marL="0">
+            <a:pPr marL="0" indent="0">
               <a:buNone/>
             </a:pPr>
             <a:r>
@@ -4185,14 +4156,14 @@
       </p:sp>
       <p:pic>
         <p:nvPicPr>
-          <p:cNvPr id="4" name="Image 0" descr="preencoded.png">    </p:cNvPr>
+          <p:cNvPr id="4" name="Image 0" descr="preencoded.png"/>
           <p:cNvPicPr>
             <a:picLocks noChangeAspect="1"/>
           </p:cNvPicPr>
           <p:nvPr/>
         </p:nvPicPr>
         <p:blipFill>
-          <a:blip r:embed="rId1"/>
+          <a:blip r:embed="rId3"/>
           <a:stretch>
             <a:fillRect/>
           </a:stretch>
@@ -4209,14 +4180,14 @@
       </p:pic>
       <p:pic>
         <p:nvPicPr>
-          <p:cNvPr id="5" name="Image 1" descr="preencoded.png">    </p:cNvPr>
+          <p:cNvPr id="5" name="Image 1" descr="preencoded.png"/>
           <p:cNvPicPr>
             <a:picLocks noChangeAspect="1"/>
           </p:cNvPicPr>
           <p:nvPr/>
         </p:nvPicPr>
         <p:blipFill>
-          <a:blip r:embed="rId2"/>
+          <a:blip r:embed="rId4"/>
           <a:stretch>
             <a:fillRect/>
           </a:stretch>
@@ -4250,6 +4221,13 @@
           </a:solidFill>
           <a:ln/>
         </p:spPr>
+        <p:txBody>
+          <a:bodyPr/>
+          <a:lstStyle/>
+          <a:p>
+            <a:endParaRPr lang="en-GB"/>
+          </a:p>
+        </p:txBody>
       </p:sp>
       <p:sp>
         <p:nvSpPr>
@@ -4270,6 +4248,13 @@
           </a:solidFill>
           <a:ln/>
         </p:spPr>
+        <p:txBody>
+          <a:bodyPr/>
+          <a:lstStyle/>
+          <a:p>
+            <a:endParaRPr lang="en-GB"/>
+          </a:p>
+        </p:txBody>
       </p:sp>
       <p:sp>
         <p:nvSpPr>
@@ -4292,7 +4277,7 @@
           <a:bodyPr wrap="square" lIns="0" tIns="0" rIns="0" bIns="0" rtlCol="0" anchor="ctr"/>
           <a:lstStyle/>
           <a:p>
-            <a:pPr indent="0" marL="0">
+            <a:pPr marL="0" indent="0">
               <a:buNone/>
             </a:pPr>
             <a:r>
@@ -4331,7 +4316,7 @@
           <a:bodyPr wrap="square" lIns="0" tIns="0" rIns="0" bIns="0" rtlCol="0" anchor="ctr"/>
           <a:lstStyle/>
           <a:p>
-            <a:pPr indent="0" marL="0">
+            <a:pPr marL="0" indent="0">
               <a:buNone/>
             </a:pPr>
             <a:r>
@@ -4343,18 +4328,18 @@
                 <a:ea typeface="Calibri" pitchFamily="34" charset="-122"/>
                 <a:cs typeface="Calibri" pitchFamily="34" charset="-120"/>
               </a:rPr>
-              <a:t>All five stocks went up over 5 years. TMGH and SWDY had the biggest jumps, but they also had the wildest swings. COMI was the steadiest performer — classic bank stock behavior.</a:t>
+              <a:t>All five stocks went up over 5 years. TMGH and SWDY had the biggest jumps, but they also had the wildest swings. COMI was the steadiest performer, classic bank stock behavior.</a:t>
             </a:r>
             <a:endParaRPr lang="en-US" sz="1100" dirty="0"/>
           </a:p>
           <a:p>
-            <a:pPr indent="0" marL="0">
+            <a:pPr marL="0" indent="0">
               <a:buNone/>
             </a:pPr>
             <a:endParaRPr lang="en-US" sz="1100" dirty="0"/>
           </a:p>
           <a:p>
-            <a:pPr indent="0" marL="0">
+            <a:pPr marL="0" indent="0">
               <a:buNone/>
             </a:pPr>
             <a:r>
@@ -4366,7 +4351,7 @@
                 <a:ea typeface="Calibri" pitchFamily="34" charset="-122"/>
                 <a:cs typeface="Calibri" pitchFamily="34" charset="-120"/>
               </a:rPr>
-              <a:t>PHDC dominates trading volume — it's by far the most actively bought and sold stock. Volume spikes happen across all stocks at the same time, which tells us the market reacts to big news as one unit, not stock by stock.</a:t>
+              <a:t>PHDC dominates trading volume, it's by far the most actively bought and sold stock. Volume spikes happen across all stocks at the same time, which tells us the market reacts to big news as one unit, not stock by stock.</a:t>
             </a:r>
             <a:endParaRPr lang="en-US" sz="1100" dirty="0"/>
           </a:p>
@@ -4388,6 +4373,7 @@
         <a:solidFill>
           <a:srgbClr val="FFFFFF"/>
         </a:solidFill>
+        <a:effectLst/>
       </p:bgPr>
     </p:bg>
     <p:spTree>
@@ -4423,6 +4409,13 @@
           </a:solidFill>
           <a:ln/>
         </p:spPr>
+        <p:txBody>
+          <a:bodyPr/>
+          <a:lstStyle/>
+          <a:p>
+            <a:endParaRPr lang="en-GB"/>
+          </a:p>
+        </p:txBody>
       </p:sp>
       <p:sp>
         <p:nvSpPr>
@@ -4445,7 +4438,7 @@
           <a:bodyPr wrap="square" lIns="0" tIns="0" rIns="0" bIns="0" rtlCol="0" anchor="ctr"/>
           <a:lstStyle/>
           <a:p>
-            <a:pPr indent="0" marL="0">
+            <a:pPr marL="0" indent="0">
               <a:buNone/>
             </a:pPr>
             <a:r>
@@ -4465,14 +4458,14 @@
       </p:sp>
       <p:pic>
         <p:nvPicPr>
-          <p:cNvPr id="4" name="Image 0" descr="preencoded.png">    </p:cNvPr>
+          <p:cNvPr id="4" name="Image 0" descr="preencoded.png"/>
           <p:cNvPicPr>
             <a:picLocks noChangeAspect="1"/>
           </p:cNvPicPr>
           <p:nvPr/>
         </p:nvPicPr>
         <p:blipFill>
-          <a:blip r:embed="rId1"/>
+          <a:blip r:embed="rId3"/>
           <a:stretch>
             <a:fillRect/>
           </a:stretch>
@@ -4506,13 +4499,20 @@
           </a:solidFill>
           <a:ln/>
           <a:effectLst>
-            <a:outerShdw sx="100000" sy="100000" kx="0" ky="0" algn="bl" rotWithShape="0" blurRad="76200" dist="25400" dir="8100000">
+            <a:outerShdw blurRad="76200" dist="25400" dir="8100000" algn="bl" rotWithShape="0">
               <a:srgbClr val="000000">
                 <a:alpha val="12000"/>
               </a:srgbClr>
             </a:outerShdw>
           </a:effectLst>
         </p:spPr>
+        <p:txBody>
+          <a:bodyPr/>
+          <a:lstStyle/>
+          <a:p>
+            <a:endParaRPr lang="en-GB"/>
+          </a:p>
+        </p:txBody>
       </p:sp>
       <p:sp>
         <p:nvSpPr>
@@ -4535,7 +4535,7 @@
           <a:bodyPr wrap="square" lIns="0" tIns="0" rIns="0" bIns="0" rtlCol="0" anchor="ctr"/>
           <a:lstStyle/>
           <a:p>
-            <a:pPr indent="0" marL="0">
+            <a:pPr marL="0" indent="0">
               <a:buNone/>
             </a:pPr>
             <a:r>
@@ -4632,7 +4632,7 @@
                 <a:ea typeface="Calibri" pitchFamily="34" charset="-122"/>
                 <a:cs typeface="Calibri" pitchFamily="34" charset="-120"/>
               </a:rPr>
-              <a:t>OCDI sits near zero — barely grew at all</a:t>
+              <a:t>OCDI sits near zero, barely grew at all</a:t>
             </a:r>
             <a:endParaRPr lang="en-US" sz="1000" dirty="0"/>
           </a:p>
@@ -4653,7 +4653,7 @@
                 <a:ea typeface="Calibri" pitchFamily="34" charset="-122"/>
                 <a:cs typeface="Calibri" pitchFamily="34" charset="-120"/>
               </a:rPr>
-              <a:t>No stock gives high reward with low risk — there's always a tradeoff</a:t>
+              <a:t>No stock gives high reward with low risk, there's always a tradeoff</a:t>
             </a:r>
             <a:endParaRPr lang="en-US" sz="1000" dirty="0"/>
           </a:p>
@@ -4678,6 +4678,13 @@
           </a:solidFill>
           <a:ln/>
         </p:spPr>
+        <p:txBody>
+          <a:bodyPr/>
+          <a:lstStyle/>
+          <a:p>
+            <a:endParaRPr lang="en-GB"/>
+          </a:p>
+        </p:txBody>
       </p:sp>
       <p:sp>
         <p:nvSpPr>
@@ -4698,6 +4705,13 @@
           </a:solidFill>
           <a:ln/>
         </p:spPr>
+        <p:txBody>
+          <a:bodyPr/>
+          <a:lstStyle/>
+          <a:p>
+            <a:endParaRPr lang="en-GB"/>
+          </a:p>
+        </p:txBody>
       </p:sp>
       <p:sp>
         <p:nvSpPr>
@@ -4720,7 +4734,7 @@
           <a:bodyPr wrap="square" lIns="0" tIns="0" rIns="0" bIns="0" rtlCol="0" anchor="ctr"/>
           <a:lstStyle/>
           <a:p>
-            <a:pPr indent="0" marL="0">
+            <a:pPr marL="0" indent="0">
               <a:buNone/>
             </a:pPr>
             <a:r>
@@ -4732,7 +4746,7 @@
                 <a:ea typeface="Calibri" pitchFamily="34" charset="-122"/>
                 <a:cs typeface="Calibri" pitchFamily="34" charset="-120"/>
               </a:rPr>
-              <a:t>The numbers back this up: all 10 stocks have kurtosis above 3, meaning extreme days (big jumps or crashes) happen way more often than you'd expect. That's typical for emerging markets like Egypt — the ride is bumpier than average.</a:t>
+              <a:t>The numbers back this up: all 10 stocks have kurtosis above 3, meaning extreme days (big jumps or crashes) happen way more often than you'd expect. That's typical for emerging markets like Egypt, the ride is bumpier than average.</a:t>
             </a:r>
             <a:endParaRPr lang="en-US" sz="1100" dirty="0"/>
           </a:p>
@@ -4754,6 +4768,7 @@
         <a:solidFill>
           <a:srgbClr val="FFFFFF"/>
         </a:solidFill>
+        <a:effectLst/>
       </p:bgPr>
     </p:bg>
     <p:spTree>
@@ -4789,6 +4804,13 @@
           </a:solidFill>
           <a:ln/>
         </p:spPr>
+        <p:txBody>
+          <a:bodyPr/>
+          <a:lstStyle/>
+          <a:p>
+            <a:endParaRPr lang="en-GB"/>
+          </a:p>
+        </p:txBody>
       </p:sp>
       <p:sp>
         <p:nvSpPr>
@@ -4811,7 +4833,7 @@
           <a:bodyPr wrap="square" lIns="0" tIns="0" rIns="0" bIns="0" rtlCol="0" anchor="ctr"/>
           <a:lstStyle/>
           <a:p>
-            <a:pPr indent="0" marL="0">
+            <a:pPr marL="0" indent="0">
               <a:buNone/>
             </a:pPr>
             <a:r>
@@ -4831,14 +4853,14 @@
       </p:sp>
       <p:pic>
         <p:nvPicPr>
-          <p:cNvPr id="4" name="Image 0" descr="preencoded.png">    </p:cNvPr>
+          <p:cNvPr id="4" name="Image 0" descr="preencoded.png"/>
           <p:cNvPicPr>
             <a:picLocks noChangeAspect="1"/>
           </p:cNvPicPr>
           <p:nvPr/>
         </p:nvPicPr>
         <p:blipFill>
-          <a:blip r:embed="rId1"/>
+          <a:blip r:embed="rId3"/>
           <a:stretch>
             <a:fillRect/>
           </a:stretch>
@@ -4872,13 +4894,20 @@
           </a:solidFill>
           <a:ln/>
           <a:effectLst>
-            <a:outerShdw sx="100000" sy="100000" kx="0" ky="0" algn="bl" rotWithShape="0" blurRad="76200" dist="25400" dir="8100000">
+            <a:outerShdw blurRad="76200" dist="25400" dir="8100000" algn="bl" rotWithShape="0">
               <a:srgbClr val="000000">
                 <a:alpha val="12000"/>
               </a:srgbClr>
             </a:outerShdw>
           </a:effectLst>
         </p:spPr>
+        <p:txBody>
+          <a:bodyPr/>
+          <a:lstStyle/>
+          <a:p>
+            <a:endParaRPr lang="en-GB"/>
+          </a:p>
+        </p:txBody>
       </p:sp>
       <p:sp>
         <p:nvSpPr>
@@ -4901,7 +4930,7 @@
           <a:bodyPr wrap="square" lIns="0" tIns="0" rIns="0" bIns="0" rtlCol="0" anchor="ctr"/>
           <a:lstStyle/>
           <a:p>
-            <a:pPr indent="0" marL="0">
+            <a:pPr marL="0" indent="0">
               <a:buNone/>
             </a:pPr>
             <a:r>
@@ -4956,7 +4985,7 @@
                 <a:ea typeface="Calibri" pitchFamily="34" charset="-122"/>
                 <a:cs typeface="Calibri" pitchFamily="34" charset="-120"/>
               </a:rPr>
-              <a:t>Same-sector stocks correlate more — TMGH &amp; PHDC (real estate) hit 0.43, HRHO &amp; CCAP (finance) hit 0.41</a:t>
+              <a:t>Same sector stocks correlate more, TMGH &amp; PHDC (real estate) hit 0.43, HRHO &amp; CCAP (finance) hit 0.41</a:t>
             </a:r>
             <a:endParaRPr lang="en-US" sz="1000" dirty="0"/>
           </a:p>
@@ -4977,7 +5006,7 @@
                 <a:ea typeface="Calibri" pitchFamily="34" charset="-122"/>
                 <a:cs typeface="Calibri" pitchFamily="34" charset="-120"/>
               </a:rPr>
-              <a:t>But even the strongest pair is only moderate — no two stocks move in perfect sync</a:t>
+              <a:t>But even the strongest pair is only moderate, no two stocks move in perfect sync</a:t>
             </a:r>
             <a:endParaRPr lang="en-US" sz="1000" dirty="0"/>
           </a:p>
@@ -4998,7 +5027,7 @@
                 <a:ea typeface="Calibri" pitchFamily="34" charset="-122"/>
                 <a:cs typeface="Calibri" pitchFamily="34" charset="-120"/>
               </a:rPr>
-              <a:t>CANA is the loner — barely correlates with anything else (0.08–0.23)</a:t>
+              <a:t>CANA is the loner, barely correlates with anything else (0.08-0.23)</a:t>
             </a:r>
             <a:endParaRPr lang="en-US" sz="1000" dirty="0"/>
           </a:p>
@@ -5041,6 +5070,7 @@
         <a:solidFill>
           <a:srgbClr val="FFFFFF"/>
         </a:solidFill>
+        <a:effectLst/>
       </p:bgPr>
     </p:bg>
     <p:spTree>
@@ -5076,6 +5106,13 @@
           </a:solidFill>
           <a:ln/>
         </p:spPr>
+        <p:txBody>
+          <a:bodyPr/>
+          <a:lstStyle/>
+          <a:p>
+            <a:endParaRPr lang="en-GB"/>
+          </a:p>
+        </p:txBody>
       </p:sp>
       <p:sp>
         <p:nvSpPr>
@@ -5098,7 +5135,7 @@
           <a:bodyPr wrap="square" lIns="0" tIns="0" rIns="0" bIns="0" rtlCol="0" anchor="ctr"/>
           <a:lstStyle/>
           <a:p>
-            <a:pPr indent="0" marL="0">
+            <a:pPr marL="0" indent="0">
               <a:buNone/>
             </a:pPr>
             <a:r>
@@ -5135,6 +5172,13 @@
           </a:solidFill>
           <a:ln/>
         </p:spPr>
+        <p:txBody>
+          <a:bodyPr/>
+          <a:lstStyle/>
+          <a:p>
+            <a:endParaRPr lang="en-GB"/>
+          </a:p>
+        </p:txBody>
       </p:sp>
       <p:sp>
         <p:nvSpPr>
@@ -5155,6 +5199,13 @@
           </a:solidFill>
           <a:ln/>
         </p:spPr>
+        <p:txBody>
+          <a:bodyPr/>
+          <a:lstStyle/>
+          <a:p>
+            <a:endParaRPr lang="en-GB"/>
+          </a:p>
+        </p:txBody>
       </p:sp>
       <p:sp>
         <p:nvSpPr>
@@ -5177,7 +5228,7 @@
           <a:bodyPr wrap="square" lIns="0" tIns="0" rIns="0" bIns="0" rtlCol="0" anchor="ctr"/>
           <a:lstStyle/>
           <a:p>
-            <a:pPr indent="0" marL="0">
+            <a:pPr marL="0" indent="0">
               <a:buNone/>
             </a:pPr>
             <a:r>
@@ -5214,13 +5265,20 @@
           </a:solidFill>
           <a:ln/>
           <a:effectLst>
-            <a:outerShdw sx="100000" sy="100000" kx="0" ky="0" algn="bl" rotWithShape="0" blurRad="76200" dist="25400" dir="8100000">
+            <a:outerShdw blurRad="76200" dist="25400" dir="8100000" algn="bl" rotWithShape="0">
               <a:srgbClr val="000000">
                 <a:alpha val="12000"/>
               </a:srgbClr>
             </a:outerShdw>
           </a:effectLst>
         </p:spPr>
+        <p:txBody>
+          <a:bodyPr/>
+          <a:lstStyle/>
+          <a:p>
+            <a:endParaRPr lang="en-GB"/>
+          </a:p>
+        </p:txBody>
       </p:sp>
       <p:sp>
         <p:nvSpPr>
@@ -5241,6 +5299,13 @@
           </a:solidFill>
           <a:ln/>
         </p:spPr>
+        <p:txBody>
+          <a:bodyPr/>
+          <a:lstStyle/>
+          <a:p>
+            <a:endParaRPr lang="en-GB"/>
+          </a:p>
+        </p:txBody>
       </p:sp>
       <p:sp>
         <p:nvSpPr>
@@ -5263,7 +5328,7 @@
           <a:bodyPr wrap="square" lIns="0" tIns="0" rIns="0" bIns="0" rtlCol="0" anchor="ctr"/>
           <a:lstStyle/>
           <a:p>
-            <a:pPr indent="0" marL="0">
+            <a:pPr marL="0" indent="0">
               <a:buNone/>
             </a:pPr>
             <a:r>
@@ -5302,7 +5367,7 @@
           <a:bodyPr wrap="square" lIns="0" tIns="0" rIns="0" bIns="0" rtlCol="0" anchor="ctr"/>
           <a:lstStyle/>
           <a:p>
-            <a:pPr indent="0" marL="0">
+            <a:pPr marL="0" indent="0">
               <a:buNone/>
             </a:pPr>
             <a:r>
@@ -5314,7 +5379,7 @@
                 <a:ea typeface="Calibri" pitchFamily="34" charset="-122"/>
                 <a:cs typeface="Calibri" pitchFamily="34" charset="-120"/>
               </a:rPr>
-              <a:t>1-Sample T-Test — p &lt; 0.05 means real trend</a:t>
+              <a:t>1-Sample T-Test: p &lt; 0.05 means real trend</a:t>
             </a:r>
             <a:endParaRPr lang="en-US" sz="900" dirty="0"/>
           </a:p>
@@ -5322,7 +5387,7 @@
       </p:sp>
       <p:graphicFrame>
         <p:nvGraphicFramePr>
-          <p:cNvPr id="7" name="Table 0"/>
+          <p:cNvPr id="11" name="Table 0"/>
           <p:cNvGraphicFramePr>
             <a:graphicFrameLocks noGrp="1"/>
           </p:cNvGraphicFramePr>
@@ -5336,16 +5401,34 @@
         </p:nvGraphicFramePr>
         <p:xfrm>
           <a:off x="502920" y="2057400"/>
-          <a:ext cx="3840480" cy="914400"/>
+          <a:ext cx="3840480" cy="1371600"/>
         </p:xfrm>
         <a:graphic>
           <a:graphicData uri="http://schemas.openxmlformats.org/drawingml/2006/table">
             <a:tbl>
               <a:tblPr/>
               <a:tblGrid>
-                <a:gridCol w="1280160"/>
-                <a:gridCol w="1280160"/>
-                <a:gridCol w="1280160"/>
+                <a:gridCol w="1280160">
+                  <a:extLst>
+                    <a:ext uri="{9D8B030D-6E8A-4147-A177-3AD203B41FA5}">
+                      <a16:colId xmlns:a16="http://schemas.microsoft.com/office/drawing/2014/main" val="20000"/>
+                    </a:ext>
+                  </a:extLst>
+                </a:gridCol>
+                <a:gridCol w="1280160">
+                  <a:extLst>
+                    <a:ext uri="{9D8B030D-6E8A-4147-A177-3AD203B41FA5}">
+                      <a16:colId xmlns:a16="http://schemas.microsoft.com/office/drawing/2014/main" val="20001"/>
+                    </a:ext>
+                  </a:extLst>
+                </a:gridCol>
+                <a:gridCol w="1280160">
+                  <a:extLst>
+                    <a:ext uri="{9D8B030D-6E8A-4147-A177-3AD203B41FA5}">
+                      <a16:colId xmlns:a16="http://schemas.microsoft.com/office/drawing/2014/main" val="20002"/>
+                    </a:ext>
+                  </a:extLst>
+                </a:gridCol>
               </a:tblGrid>
               <a:tr h="228600">
                 <a:tc>
@@ -5353,7 +5436,7 @@
                     <a:bodyPr/>
                     <a:lstStyle/>
                     <a:p>
-                      <a:pPr indent="0" marL="0">
+                      <a:pPr marL="0" indent="0">
                         <a:buNone/>
                       </a:pPr>
                       <a:r>
@@ -5374,7 +5457,7 @@
                       </a:endParaRPr>
                     </a:p>
                   </a:txBody>
-                  <a:tcPr marL="91440" marR="91440" marT="45720" marB="45720">
+                  <a:tcPr>
                     <a:lnL w="6350" cap="flat" cmpd="sng" algn="ctr">
                       <a:solidFill>
                         <a:srgbClr val="E2E8F0"/>
@@ -5421,7 +5504,7 @@
                     <a:bodyPr/>
                     <a:lstStyle/>
                     <a:p>
-                      <a:pPr indent="0" marL="0">
+                      <a:pPr marL="0" indent="0">
                         <a:buNone/>
                       </a:pPr>
                       <a:r>
@@ -5442,7 +5525,7 @@
                       </a:endParaRPr>
                     </a:p>
                   </a:txBody>
-                  <a:tcPr marL="91440" marR="91440" marT="45720" marB="45720">
+                  <a:tcPr>
                     <a:lnL w="6350" cap="flat" cmpd="sng" algn="ctr">
                       <a:solidFill>
                         <a:srgbClr val="E2E8F0"/>
@@ -5489,7 +5572,7 @@
                     <a:bodyPr/>
                     <a:lstStyle/>
                     <a:p>
-                      <a:pPr indent="0" marL="0">
+                      <a:pPr marL="0" indent="0">
                         <a:buNone/>
                       </a:pPr>
                       <a:r>
@@ -5510,7 +5593,7 @@
                       </a:endParaRPr>
                     </a:p>
                   </a:txBody>
-                  <a:tcPr marL="91440" marR="91440" marT="45720" marB="45720">
+                  <a:tcPr>
                     <a:lnL w="6350" cap="flat" cmpd="sng" algn="ctr">
                       <a:solidFill>
                         <a:srgbClr val="E2E8F0"/>
@@ -5552,6 +5635,11 @@
                     </a:solidFill>
                   </a:tcPr>
                 </a:tc>
+                <a:extLst>
+                  <a:ext uri="{0D108BD9-81ED-4DB2-BD59-A6C34878D82A}">
+                    <a16:rowId xmlns:a16="http://schemas.microsoft.com/office/drawing/2014/main" val="10000"/>
+                  </a:ext>
+                </a:extLst>
               </a:tr>
               <a:tr h="201168">
                 <a:tc>
@@ -5559,7 +5647,7 @@
                     <a:bodyPr/>
                     <a:lstStyle/>
                     <a:p>
-                      <a:pPr indent="0" marL="0">
+                      <a:pPr marL="0" indent="0">
                         <a:buNone/>
                       </a:pPr>
                       <a:r>
@@ -5580,7 +5668,7 @@
                       </a:endParaRPr>
                     </a:p>
                   </a:txBody>
-                  <a:tcPr marL="91440" marR="91440" marT="45720" marB="45720">
+                  <a:tcPr>
                     <a:lnL w="6350" cap="flat" cmpd="sng" algn="ctr">
                       <a:solidFill>
                         <a:srgbClr val="E2E8F0"/>
@@ -5624,7 +5712,7 @@
                     <a:bodyPr/>
                     <a:lstStyle/>
                     <a:p>
-                      <a:pPr indent="0" marL="0">
+                      <a:pPr marL="0" indent="0">
                         <a:buNone/>
                       </a:pPr>
                       <a:r>
@@ -5645,7 +5733,7 @@
                       </a:endParaRPr>
                     </a:p>
                   </a:txBody>
-                  <a:tcPr marL="91440" marR="91440" marT="45720" marB="45720">
+                  <a:tcPr>
                     <a:lnL w="6350" cap="flat" cmpd="sng" algn="ctr">
                       <a:solidFill>
                         <a:srgbClr val="E2E8F0"/>
@@ -5689,7 +5777,7 @@
                     <a:bodyPr/>
                     <a:lstStyle/>
                     <a:p>
-                      <a:pPr indent="0" marL="0">
+                      <a:pPr marL="0" indent="0">
                         <a:buNone/>
                       </a:pPr>
                       <a:r>
@@ -5710,7 +5798,7 @@
                       </a:endParaRPr>
                     </a:p>
                   </a:txBody>
-                  <a:tcPr marL="91440" marR="91440" marT="45720" marB="45720">
+                  <a:tcPr>
                     <a:lnL w="6350" cap="flat" cmpd="sng" algn="ctr">
                       <a:solidFill>
                         <a:srgbClr val="E2E8F0"/>
@@ -5749,6 +5837,11 @@
                     </a:lnB>
                   </a:tcPr>
                 </a:tc>
+                <a:extLst>
+                  <a:ext uri="{0D108BD9-81ED-4DB2-BD59-A6C34878D82A}">
+                    <a16:rowId xmlns:a16="http://schemas.microsoft.com/office/drawing/2014/main" val="10001"/>
+                  </a:ext>
+                </a:extLst>
               </a:tr>
               <a:tr h="201168">
                 <a:tc>
@@ -5756,7 +5849,7 @@
                     <a:bodyPr/>
                     <a:lstStyle/>
                     <a:p>
-                      <a:pPr indent="0" marL="0">
+                      <a:pPr marL="0" indent="0">
                         <a:buNone/>
                       </a:pPr>
                       <a:r>
@@ -5777,7 +5870,7 @@
                       </a:endParaRPr>
                     </a:p>
                   </a:txBody>
-                  <a:tcPr marL="91440" marR="91440" marT="45720" marB="45720">
+                  <a:tcPr>
                     <a:lnL w="6350" cap="flat" cmpd="sng" algn="ctr">
                       <a:solidFill>
                         <a:srgbClr val="E2E8F0"/>
@@ -5821,7 +5914,7 @@
                     <a:bodyPr/>
                     <a:lstStyle/>
                     <a:p>
-                      <a:pPr indent="0" marL="0">
+                      <a:pPr marL="0" indent="0">
                         <a:buNone/>
                       </a:pPr>
                       <a:r>
@@ -5842,7 +5935,7 @@
                       </a:endParaRPr>
                     </a:p>
                   </a:txBody>
-                  <a:tcPr marL="91440" marR="91440" marT="45720" marB="45720">
+                  <a:tcPr>
                     <a:lnL w="6350" cap="flat" cmpd="sng" algn="ctr">
                       <a:solidFill>
                         <a:srgbClr val="E2E8F0"/>
@@ -5886,7 +5979,7 @@
                     <a:bodyPr/>
                     <a:lstStyle/>
                     <a:p>
-                      <a:pPr indent="0" marL="0">
+                      <a:pPr marL="0" indent="0">
                         <a:buNone/>
                       </a:pPr>
                       <a:r>
@@ -5907,7 +6000,7 @@
                       </a:endParaRPr>
                     </a:p>
                   </a:txBody>
-                  <a:tcPr marL="91440" marR="91440" marT="45720" marB="45720">
+                  <a:tcPr>
                     <a:lnL w="6350" cap="flat" cmpd="sng" algn="ctr">
                       <a:solidFill>
                         <a:srgbClr val="E2E8F0"/>
@@ -5946,6 +6039,11 @@
                     </a:lnB>
                   </a:tcPr>
                 </a:tc>
+                <a:extLst>
+                  <a:ext uri="{0D108BD9-81ED-4DB2-BD59-A6C34878D82A}">
+                    <a16:rowId xmlns:a16="http://schemas.microsoft.com/office/drawing/2014/main" val="10002"/>
+                  </a:ext>
+                </a:extLst>
               </a:tr>
               <a:tr h="201168">
                 <a:tc>
@@ -5953,7 +6051,7 @@
                     <a:bodyPr/>
                     <a:lstStyle/>
                     <a:p>
-                      <a:pPr indent="0" marL="0">
+                      <a:pPr marL="0" indent="0">
                         <a:buNone/>
                       </a:pPr>
                       <a:r>
@@ -5974,7 +6072,7 @@
                       </a:endParaRPr>
                     </a:p>
                   </a:txBody>
-                  <a:tcPr marL="91440" marR="91440" marT="45720" marB="45720">
+                  <a:tcPr>
                     <a:lnL w="6350" cap="flat" cmpd="sng" algn="ctr">
                       <a:solidFill>
                         <a:srgbClr val="E2E8F0"/>
@@ -6018,7 +6116,7 @@
                     <a:bodyPr/>
                     <a:lstStyle/>
                     <a:p>
-                      <a:pPr indent="0" marL="0">
+                      <a:pPr marL="0" indent="0">
                         <a:buNone/>
                       </a:pPr>
                       <a:r>
@@ -6039,7 +6137,7 @@
                       </a:endParaRPr>
                     </a:p>
                   </a:txBody>
-                  <a:tcPr marL="91440" marR="91440" marT="45720" marB="45720">
+                  <a:tcPr>
                     <a:lnL w="6350" cap="flat" cmpd="sng" algn="ctr">
                       <a:solidFill>
                         <a:srgbClr val="E2E8F0"/>
@@ -6083,7 +6181,7 @@
                     <a:bodyPr/>
                     <a:lstStyle/>
                     <a:p>
-                      <a:pPr indent="0" marL="0">
+                      <a:pPr marL="0" indent="0">
                         <a:buNone/>
                       </a:pPr>
                       <a:r>
@@ -6104,7 +6202,7 @@
                       </a:endParaRPr>
                     </a:p>
                   </a:txBody>
-                  <a:tcPr marL="91440" marR="91440" marT="45720" marB="45720">
+                  <a:tcPr>
                     <a:lnL w="6350" cap="flat" cmpd="sng" algn="ctr">
                       <a:solidFill>
                         <a:srgbClr val="E2E8F0"/>
@@ -6143,6 +6241,11 @@
                     </a:lnB>
                   </a:tcPr>
                 </a:tc>
+                <a:extLst>
+                  <a:ext uri="{0D108BD9-81ED-4DB2-BD59-A6C34878D82A}">
+                    <a16:rowId xmlns:a16="http://schemas.microsoft.com/office/drawing/2014/main" val="10003"/>
+                  </a:ext>
+                </a:extLst>
               </a:tr>
               <a:tr h="201168">
                 <a:tc>
@@ -6150,7 +6253,7 @@
                     <a:bodyPr/>
                     <a:lstStyle/>
                     <a:p>
-                      <a:pPr indent="0" marL="0">
+                      <a:pPr marL="0" indent="0">
                         <a:buNone/>
                       </a:pPr>
                       <a:r>
@@ -6171,7 +6274,7 @@
                       </a:endParaRPr>
                     </a:p>
                   </a:txBody>
-                  <a:tcPr marL="91440" marR="91440" marT="45720" marB="45720">
+                  <a:tcPr>
                     <a:lnL w="6350" cap="flat" cmpd="sng" algn="ctr">
                       <a:solidFill>
                         <a:srgbClr val="E2E8F0"/>
@@ -6215,7 +6318,7 @@
                     <a:bodyPr/>
                     <a:lstStyle/>
                     <a:p>
-                      <a:pPr indent="0" marL="0">
+                      <a:pPr marL="0" indent="0">
                         <a:buNone/>
                       </a:pPr>
                       <a:r>
@@ -6236,7 +6339,7 @@
                       </a:endParaRPr>
                     </a:p>
                   </a:txBody>
-                  <a:tcPr marL="91440" marR="91440" marT="45720" marB="45720">
+                  <a:tcPr>
                     <a:lnL w="6350" cap="flat" cmpd="sng" algn="ctr">
                       <a:solidFill>
                         <a:srgbClr val="E2E8F0"/>
@@ -6280,7 +6383,7 @@
                     <a:bodyPr/>
                     <a:lstStyle/>
                     <a:p>
-                      <a:pPr indent="0" marL="0">
+                      <a:pPr marL="0" indent="0">
                         <a:buNone/>
                       </a:pPr>
                       <a:r>
@@ -6301,7 +6404,7 @@
                       </a:endParaRPr>
                     </a:p>
                   </a:txBody>
-                  <a:tcPr marL="91440" marR="91440" marT="45720" marB="45720">
+                  <a:tcPr>
                     <a:lnL w="6350" cap="flat" cmpd="sng" algn="ctr">
                       <a:solidFill>
                         <a:srgbClr val="E2E8F0"/>
@@ -6340,6 +6443,11 @@
                     </a:lnB>
                   </a:tcPr>
                 </a:tc>
+                <a:extLst>
+                  <a:ext uri="{0D108BD9-81ED-4DB2-BD59-A6C34878D82A}">
+                    <a16:rowId xmlns:a16="http://schemas.microsoft.com/office/drawing/2014/main" val="10004"/>
+                  </a:ext>
+                </a:extLst>
               </a:tr>
               <a:tr h="201168">
                 <a:tc>
@@ -6347,7 +6455,7 @@
                     <a:bodyPr/>
                     <a:lstStyle/>
                     <a:p>
-                      <a:pPr indent="0" marL="0">
+                      <a:pPr marL="0" indent="0">
                         <a:buNone/>
                       </a:pPr>
                       <a:r>
@@ -6368,7 +6476,7 @@
                       </a:endParaRPr>
                     </a:p>
                   </a:txBody>
-                  <a:tcPr marL="91440" marR="91440" marT="45720" marB="45720">
+                  <a:tcPr>
                     <a:lnL w="6350" cap="flat" cmpd="sng" algn="ctr">
                       <a:solidFill>
                         <a:srgbClr val="E2E8F0"/>
@@ -6412,7 +6520,7 @@
                     <a:bodyPr/>
                     <a:lstStyle/>
                     <a:p>
-                      <a:pPr indent="0" marL="0">
+                      <a:pPr marL="0" indent="0">
                         <a:buNone/>
                       </a:pPr>
                       <a:r>
@@ -6433,7 +6541,7 @@
                       </a:endParaRPr>
                     </a:p>
                   </a:txBody>
-                  <a:tcPr marL="91440" marR="91440" marT="45720" marB="45720">
+                  <a:tcPr>
                     <a:lnL w="6350" cap="flat" cmpd="sng" algn="ctr">
                       <a:solidFill>
                         <a:srgbClr val="E2E8F0"/>
@@ -6477,7 +6585,7 @@
                     <a:bodyPr/>
                     <a:lstStyle/>
                     <a:p>
-                      <a:pPr indent="0" marL="0">
+                      <a:pPr marL="0" indent="0">
                         <a:buNone/>
                       </a:pPr>
                       <a:r>
@@ -6498,7 +6606,7 @@
                       </a:endParaRPr>
                     </a:p>
                   </a:txBody>
-                  <a:tcPr marL="91440" marR="91440" marT="45720" marB="45720">
+                  <a:tcPr>
                     <a:lnL w="6350" cap="flat" cmpd="sng" algn="ctr">
                       <a:solidFill>
                         <a:srgbClr val="E2E8F0"/>
@@ -6537,6 +6645,11 @@
                     </a:lnB>
                   </a:tcPr>
                 </a:tc>
+                <a:extLst>
+                  <a:ext uri="{0D108BD9-81ED-4DB2-BD59-A6C34878D82A}">
+                    <a16:rowId xmlns:a16="http://schemas.microsoft.com/office/drawing/2014/main" val="10005"/>
+                  </a:ext>
+                </a:extLst>
               </a:tr>
             </a:tbl>
           </a:graphicData>
@@ -6563,7 +6676,7 @@
           <a:bodyPr wrap="square" lIns="0" tIns="0" rIns="0" bIns="0" rtlCol="0" anchor="ctr"/>
           <a:lstStyle/>
           <a:p>
-            <a:pPr indent="0" marL="0">
+            <a:pPr marL="0" indent="0">
               <a:buNone/>
             </a:pPr>
             <a:r>
@@ -6580,7 +6693,7 @@
             <a:endParaRPr lang="en-US" sz="1100" dirty="0"/>
           </a:p>
           <a:p>
-            <a:pPr indent="0" marL="0">
+            <a:pPr marL="0" indent="0">
               <a:buNone/>
             </a:pPr>
             <a:r>
@@ -6617,13 +6730,20 @@
           </a:solidFill>
           <a:ln/>
           <a:effectLst>
-            <a:outerShdw sx="100000" sy="100000" kx="0" ky="0" algn="bl" rotWithShape="0" blurRad="76200" dist="25400" dir="8100000">
+            <a:outerShdw blurRad="76200" dist="25400" dir="8100000" algn="bl" rotWithShape="0">
               <a:srgbClr val="000000">
                 <a:alpha val="12000"/>
               </a:srgbClr>
             </a:outerShdw>
           </a:effectLst>
         </p:spPr>
+        <p:txBody>
+          <a:bodyPr/>
+          <a:lstStyle/>
+          <a:p>
+            <a:endParaRPr lang="en-GB"/>
+          </a:p>
+        </p:txBody>
       </p:sp>
       <p:sp>
         <p:nvSpPr>
@@ -6644,6 +6764,13 @@
           </a:solidFill>
           <a:ln/>
         </p:spPr>
+        <p:txBody>
+          <a:bodyPr/>
+          <a:lstStyle/>
+          <a:p>
+            <a:endParaRPr lang="en-GB"/>
+          </a:p>
+        </p:txBody>
       </p:sp>
       <p:sp>
         <p:nvSpPr>
@@ -6666,7 +6793,7 @@
           <a:bodyPr wrap="square" lIns="0" tIns="0" rIns="0" bIns="0" rtlCol="0" anchor="ctr"/>
           <a:lstStyle/>
           <a:p>
-            <a:pPr indent="0" marL="0">
+            <a:pPr marL="0" indent="0">
               <a:buNone/>
             </a:pPr>
             <a:r>
@@ -6705,7 +6832,7 @@
           <a:bodyPr wrap="square" lIns="0" tIns="0" rIns="0" bIns="0" rtlCol="0" anchor="ctr"/>
           <a:lstStyle/>
           <a:p>
-            <a:pPr indent="0" marL="0">
+            <a:pPr marL="0" indent="0">
               <a:buNone/>
             </a:pPr>
             <a:r>
@@ -6717,7 +6844,7 @@
                 <a:ea typeface="Calibri" pitchFamily="34" charset="-122"/>
                 <a:cs typeface="Calibri" pitchFamily="34" charset="-120"/>
               </a:rPr>
-              <a:t>2-Sample T-Test — p &gt; 0.05 means no difference</a:t>
+              <a:t>2-Sample T-Test: p &gt; 0.05 means no difference</a:t>
             </a:r>
             <a:endParaRPr lang="en-US" sz="900" dirty="0"/>
           </a:p>
@@ -6744,7 +6871,7 @@
           <a:bodyPr wrap="square" lIns="0" tIns="0" rIns="0" bIns="0" rtlCol="0" anchor="ctr"/>
           <a:lstStyle/>
           <a:p>
-            <a:pPr indent="0" marL="0">
+            <a:pPr marL="0" indent="0">
               <a:buNone/>
             </a:pPr>
             <a:r>
@@ -6783,7 +6910,7 @@
           <a:bodyPr wrap="square" lIns="0" tIns="0" rIns="0" bIns="0" rtlCol="0" anchor="ctr"/>
           <a:lstStyle/>
           <a:p>
-            <a:pPr indent="0" marL="0">
+            <a:pPr marL="0" indent="0">
               <a:buNone/>
             </a:pPr>
             <a:r>
@@ -6822,7 +6949,7 @@
           <a:bodyPr wrap="square" lIns="0" tIns="0" rIns="0" bIns="0" rtlCol="0" anchor="ctr"/>
           <a:lstStyle/>
           <a:p>
-            <a:pPr indent="0" marL="0">
+            <a:pPr marL="0" indent="0">
               <a:buNone/>
             </a:pPr>
             <a:r>
@@ -6834,7 +6961,7 @@
                 <a:ea typeface="Calibri" pitchFamily="34" charset="-122"/>
                 <a:cs typeface="Calibri" pitchFamily="34" charset="-120"/>
               </a:rPr>
-              <a:t>No difference — they move together</a:t>
+              <a:t>No difference, they move together</a:t>
             </a:r>
             <a:endParaRPr lang="en-US" sz="1000" dirty="0"/>
           </a:p>
@@ -6861,7 +6988,7 @@
           <a:bodyPr wrap="square" lIns="0" tIns="0" rIns="0" bIns="0" rtlCol="0" anchor="ctr"/>
           <a:lstStyle/>
           <a:p>
-            <a:pPr indent="0" marL="0">
+            <a:pPr marL="0" indent="0">
               <a:buNone/>
             </a:pPr>
             <a:r>
@@ -6878,7 +7005,7 @@
             <a:endParaRPr lang="en-US" sz="1100" dirty="0"/>
           </a:p>
           <a:p>
-            <a:pPr indent="0" marL="0">
+            <a:pPr marL="0" indent="0">
               <a:buNone/>
             </a:pPr>
             <a:r>
@@ -6895,7 +7022,7 @@
             <a:endParaRPr lang="en-US" sz="1100" dirty="0"/>
           </a:p>
           <a:p>
-            <a:pPr indent="0" marL="0">
+            <a:pPr marL="0" indent="0">
               <a:buNone/>
             </a:pPr>
             <a:r>
@@ -6932,6 +7059,13 @@
           </a:solidFill>
           <a:ln/>
         </p:spPr>
+        <p:txBody>
+          <a:bodyPr/>
+          <a:lstStyle/>
+          <a:p>
+            <a:endParaRPr lang="en-GB"/>
+          </a:p>
+        </p:txBody>
       </p:sp>
       <p:sp>
         <p:nvSpPr>
@@ -6952,6 +7086,13 @@
           </a:solidFill>
           <a:ln/>
         </p:spPr>
+        <p:txBody>
+          <a:bodyPr/>
+          <a:lstStyle/>
+          <a:p>
+            <a:endParaRPr lang="en-GB"/>
+          </a:p>
+        </p:txBody>
       </p:sp>
       <p:sp>
         <p:nvSpPr>
@@ -6974,7 +7115,7 @@
           <a:bodyPr wrap="square" lIns="0" tIns="0" rIns="0" bIns="0" rtlCol="0" anchor="ctr"/>
           <a:lstStyle/>
           <a:p>
-            <a:pPr indent="0" marL="0">
+            <a:pPr marL="0" indent="0">
               <a:buNone/>
             </a:pPr>
             <a:r>
@@ -6986,7 +7127,7 @@
                 <a:ea typeface="Calibri" pitchFamily="34" charset="-122"/>
                 <a:cs typeface="Calibri" pitchFamily="34" charset="-120"/>
               </a:rPr>
-              <a:t>These aren't contradictory — Test 1 says "stocks are genuinely going up" and Test 2 says "they're all going up together." Same macro forces push everything.</a:t>
+              <a:t>These aren't contradictory, Test 1 says "stocks are genuinely going up" and Test 2 says "they're all going up together." Same macro forces push everything.</a:t>
             </a:r>
             <a:endParaRPr lang="en-US" sz="1050" dirty="0"/>
           </a:p>
@@ -7008,6 +7149,7 @@
         <a:solidFill>
           <a:srgbClr val="FFFFFF"/>
         </a:solidFill>
+        <a:effectLst/>
       </p:bgPr>
     </p:bg>
     <p:spTree>
@@ -7043,6 +7185,13 @@
           </a:solidFill>
           <a:ln/>
         </p:spPr>
+        <p:txBody>
+          <a:bodyPr/>
+          <a:lstStyle/>
+          <a:p>
+            <a:endParaRPr lang="en-GB"/>
+          </a:p>
+        </p:txBody>
       </p:sp>
       <p:sp>
         <p:nvSpPr>
@@ -7065,7 +7214,7 @@
           <a:bodyPr wrap="square" lIns="0" tIns="0" rIns="0" bIns="0" rtlCol="0" anchor="ctr"/>
           <a:lstStyle/>
           <a:p>
-            <a:pPr indent="0" marL="0">
+            <a:pPr marL="0" indent="0">
               <a:buNone/>
             </a:pPr>
             <a:r>
@@ -7085,14 +7234,14 @@
       </p:sp>
       <p:pic>
         <p:nvPicPr>
-          <p:cNvPr id="4" name="Image 0" descr="preencoded.png">    </p:cNvPr>
+          <p:cNvPr id="4" name="Image 0" descr="preencoded.png"/>
           <p:cNvPicPr>
             <a:picLocks noChangeAspect="1"/>
           </p:cNvPicPr>
           <p:nvPr/>
         </p:nvPicPr>
         <p:blipFill>
-          <a:blip r:embed="rId1"/>
+          <a:blip r:embed="rId3"/>
           <a:stretch>
             <a:fillRect/>
           </a:stretch>
@@ -7126,6 +7275,13 @@
           </a:solidFill>
           <a:ln/>
         </p:spPr>
+        <p:txBody>
+          <a:bodyPr/>
+          <a:lstStyle/>
+          <a:p>
+            <a:endParaRPr lang="en-GB"/>
+          </a:p>
+        </p:txBody>
       </p:sp>
       <p:sp>
         <p:nvSpPr>
@@ -7146,6 +7302,13 @@
           </a:solidFill>
           <a:ln/>
         </p:spPr>
+        <p:txBody>
+          <a:bodyPr/>
+          <a:lstStyle/>
+          <a:p>
+            <a:endParaRPr lang="en-GB"/>
+          </a:p>
+        </p:txBody>
       </p:sp>
       <p:sp>
         <p:nvSpPr>
@@ -7168,7 +7331,7 @@
           <a:bodyPr wrap="square" lIns="0" tIns="0" rIns="0" bIns="0" rtlCol="0" anchor="ctr"/>
           <a:lstStyle/>
           <a:p>
-            <a:pPr indent="0" marL="0">
+            <a:pPr marL="0" indent="0">
               <a:buNone/>
             </a:pPr>
             <a:r>
@@ -7180,7 +7343,7 @@
                 <a:ea typeface="Calibri" pitchFamily="34" charset="-122"/>
                 <a:cs typeface="Calibri" pitchFamily="34" charset="-120"/>
               </a:rPr>
-              <a:t>All five sector lines spike and dip at almost exactly the same time. Banking, Real Estate, Telecom, Finance, Industry — they all dance to the same beat. When the Central Bank makes a move or the pound crashes, nobody is spared. This is why sector diversification within EGX30 doesn't buy you much protection.</a:t>
+              <a:t>All five sector lines spike and dip at almost exactly the same time. Banking, Real Estate, Telecom, Finance, Industry. They all dance to the same beat. When the Central Bank makes a move or the pound crashes, nobody is spared. This is why sector diversification within EGX30 doesn't buy you much protection.</a:t>
             </a:r>
             <a:endParaRPr lang="en-US" sz="1100" dirty="0"/>
           </a:p>
@@ -7202,6 +7365,7 @@
         <a:solidFill>
           <a:srgbClr val="FFFFFF"/>
         </a:solidFill>
+        <a:effectLst/>
       </p:bgPr>
     </p:bg>
     <p:spTree>
@@ -7237,6 +7401,13 @@
           </a:solidFill>
           <a:ln/>
         </p:spPr>
+        <p:txBody>
+          <a:bodyPr/>
+          <a:lstStyle/>
+          <a:p>
+            <a:endParaRPr lang="en-GB"/>
+          </a:p>
+        </p:txBody>
       </p:sp>
       <p:sp>
         <p:nvSpPr>
@@ -7259,7 +7430,7 @@
           <a:bodyPr wrap="square" lIns="0" tIns="0" rIns="0" bIns="0" rtlCol="0" anchor="ctr"/>
           <a:lstStyle/>
           <a:p>
-            <a:pPr indent="0" marL="0">
+            <a:pPr marL="0" indent="0">
               <a:buNone/>
             </a:pPr>
             <a:r>
@@ -7279,14 +7450,14 @@
       </p:sp>
       <p:pic>
         <p:nvPicPr>
-          <p:cNvPr id="4" name="Image 0" descr="preencoded.png">    </p:cNvPr>
+          <p:cNvPr id="4" name="Image 0" descr="preencoded.png"/>
           <p:cNvPicPr>
             <a:picLocks noChangeAspect="1"/>
           </p:cNvPicPr>
           <p:nvPr/>
         </p:nvPicPr>
         <p:blipFill>
-          <a:blip r:embed="rId1"/>
+          <a:blip r:embed="rId3"/>
           <a:stretch>
             <a:fillRect/>
           </a:stretch>
@@ -7303,14 +7474,14 @@
       </p:pic>
       <p:pic>
         <p:nvPicPr>
-          <p:cNvPr id="5" name="Image 1" descr="preencoded.png">    </p:cNvPr>
+          <p:cNvPr id="5" name="Image 1" descr="preencoded.png"/>
           <p:cNvPicPr>
             <a:picLocks noChangeAspect="1"/>
           </p:cNvPicPr>
           <p:nvPr/>
         </p:nvPicPr>
         <p:blipFill>
-          <a:blip r:embed="rId2"/>
+          <a:blip r:embed="rId4"/>
           <a:stretch>
             <a:fillRect/>
           </a:stretch>
@@ -7344,13 +7515,20 @@
           </a:solidFill>
           <a:ln/>
           <a:effectLst>
-            <a:outerShdw sx="100000" sy="100000" kx="0" ky="0" algn="bl" rotWithShape="0" blurRad="76200" dist="25400" dir="8100000">
+            <a:outerShdw blurRad="76200" dist="25400" dir="8100000" algn="bl" rotWithShape="0">
               <a:srgbClr val="000000">
                 <a:alpha val="12000"/>
               </a:srgbClr>
             </a:outerShdw>
           </a:effectLst>
         </p:spPr>
+        <p:txBody>
+          <a:bodyPr/>
+          <a:lstStyle/>
+          <a:p>
+            <a:endParaRPr lang="en-GB"/>
+          </a:p>
+        </p:txBody>
       </p:sp>
       <p:sp>
         <p:nvSpPr>
@@ -7373,7 +7551,7 @@
           <a:bodyPr wrap="square" lIns="0" tIns="0" rIns="0" bIns="0" rtlCol="0" anchor="ctr"/>
           <a:lstStyle/>
           <a:p>
-            <a:pPr indent="0" marL="0">
+            <a:pPr marL="0" indent="0">
               <a:buNone/>
             </a:pPr>
             <a:r>
@@ -7410,6 +7588,13 @@
           </a:solidFill>
           <a:ln/>
         </p:spPr>
+        <p:txBody>
+          <a:bodyPr/>
+          <a:lstStyle/>
+          <a:p>
+            <a:endParaRPr lang="en-GB"/>
+          </a:p>
+        </p:txBody>
       </p:sp>
       <p:sp>
         <p:nvSpPr>
@@ -7430,6 +7615,13 @@
           </a:solidFill>
           <a:ln/>
         </p:spPr>
+        <p:txBody>
+          <a:bodyPr/>
+          <a:lstStyle/>
+          <a:p>
+            <a:endParaRPr lang="en-GB"/>
+          </a:p>
+        </p:txBody>
       </p:sp>
       <p:sp>
         <p:nvSpPr>
@@ -7452,7 +7644,7 @@
           <a:bodyPr wrap="square" lIns="0" tIns="0" rIns="0" bIns="0" rtlCol="0" anchor="ctr"/>
           <a:lstStyle/>
           <a:p>
-            <a:pPr indent="0" marL="0">
+            <a:pPr marL="0" indent="0">
               <a:buNone/>
             </a:pPr>
             <a:r>
@@ -7491,7 +7683,7 @@
           <a:bodyPr wrap="square" lIns="0" tIns="0" rIns="0" bIns="0" rtlCol="0" anchor="ctr"/>
           <a:lstStyle/>
           <a:p>
-            <a:pPr indent="0" marL="0">
+            <a:pPr marL="0" indent="0">
               <a:buNone/>
             </a:pPr>
             <a:r>
@@ -7530,7 +7722,7 @@
           <a:bodyPr wrap="square" lIns="0" tIns="0" rIns="0" bIns="0" rtlCol="0" anchor="ctr"/>
           <a:lstStyle/>
           <a:p>
-            <a:pPr indent="0" marL="0">
+            <a:pPr marL="0" indent="0">
               <a:buNone/>
             </a:pPr>
             <a:r>
@@ -7567,6 +7759,13 @@
           </a:solidFill>
           <a:ln/>
         </p:spPr>
+        <p:txBody>
+          <a:bodyPr/>
+          <a:lstStyle/>
+          <a:p>
+            <a:endParaRPr lang="en-GB"/>
+          </a:p>
+        </p:txBody>
       </p:sp>
       <p:sp>
         <p:nvSpPr>
@@ -7587,6 +7786,13 @@
           </a:solidFill>
           <a:ln/>
         </p:spPr>
+        <p:txBody>
+          <a:bodyPr/>
+          <a:lstStyle/>
+          <a:p>
+            <a:endParaRPr lang="en-GB"/>
+          </a:p>
+        </p:txBody>
       </p:sp>
       <p:sp>
         <p:nvSpPr>
@@ -7609,7 +7815,7 @@
           <a:bodyPr wrap="square" lIns="0" tIns="0" rIns="0" bIns="0" rtlCol="0" anchor="ctr"/>
           <a:lstStyle/>
           <a:p>
-            <a:pPr indent="0" marL="0">
+            <a:pPr marL="0" indent="0">
               <a:buNone/>
             </a:pPr>
             <a:r>
@@ -7648,7 +7854,7 @@
           <a:bodyPr wrap="square" lIns="0" tIns="0" rIns="0" bIns="0" rtlCol="0" anchor="ctr"/>
           <a:lstStyle/>
           <a:p>
-            <a:pPr indent="0" marL="0">
+            <a:pPr marL="0" indent="0">
               <a:buNone/>
             </a:pPr>
             <a:r>
@@ -7687,7 +7893,7 @@
           <a:bodyPr wrap="square" lIns="0" tIns="0" rIns="0" bIns="0" rtlCol="0" anchor="ctr"/>
           <a:lstStyle/>
           <a:p>
-            <a:pPr indent="0" marL="0">
+            <a:pPr marL="0" indent="0">
               <a:buNone/>
             </a:pPr>
             <a:r>
@@ -7724,6 +7930,13 @@
           </a:solidFill>
           <a:ln/>
         </p:spPr>
+        <p:txBody>
+          <a:bodyPr/>
+          <a:lstStyle/>
+          <a:p>
+            <a:endParaRPr lang="en-GB"/>
+          </a:p>
+        </p:txBody>
       </p:sp>
       <p:sp>
         <p:nvSpPr>
@@ -7744,6 +7957,13 @@
           </a:solidFill>
           <a:ln/>
         </p:spPr>
+        <p:txBody>
+          <a:bodyPr/>
+          <a:lstStyle/>
+          <a:p>
+            <a:endParaRPr lang="en-GB"/>
+          </a:p>
+        </p:txBody>
       </p:sp>
       <p:sp>
         <p:nvSpPr>
@@ -7766,7 +7986,7 @@
           <a:bodyPr wrap="square" lIns="0" tIns="0" rIns="0" bIns="0" rtlCol="0" anchor="ctr"/>
           <a:lstStyle/>
           <a:p>
-            <a:pPr indent="0" marL="0">
+            <a:pPr marL="0" indent="0">
               <a:buNone/>
             </a:pPr>
             <a:r>
@@ -7805,7 +8025,7 @@
           <a:bodyPr wrap="square" lIns="0" tIns="0" rIns="0" bIns="0" rtlCol="0" anchor="ctr"/>
           <a:lstStyle/>
           <a:p>
-            <a:pPr indent="0" marL="0">
+            <a:pPr marL="0" indent="0">
               <a:buNone/>
             </a:pPr>
             <a:r>
@@ -7844,7 +8064,7 @@
           <a:bodyPr wrap="square" lIns="0" tIns="0" rIns="0" bIns="0" rtlCol="0" anchor="ctr"/>
           <a:lstStyle/>
           <a:p>
-            <a:pPr indent="0" marL="0">
+            <a:pPr marL="0" indent="0">
               <a:buNone/>
             </a:pPr>
             <a:r>
@@ -7856,7 +8076,7 @@
                 <a:ea typeface="Calibri" pitchFamily="34" charset="-122"/>
                 <a:cs typeface="Calibri" pitchFamily="34" charset="-120"/>
               </a:rPr>
-              <a:t>Massive — doubled daily swings</a:t>
+              <a:t>Massive, doubled daily swings</a:t>
             </a:r>
             <a:endParaRPr lang="en-US" sz="1000" dirty="0"/>
           </a:p>
@@ -7883,7 +8103,7 @@
           <a:bodyPr wrap="square" lIns="0" tIns="0" rIns="0" bIns="0" rtlCol="0" anchor="ctr"/>
           <a:lstStyle/>
           <a:p>
-            <a:pPr indent="0" marL="0">
+            <a:pPr marL="0" indent="0">
               <a:buNone/>
             </a:pPr>
             <a:r>
@@ -7900,7 +8120,7 @@
             <a:endParaRPr lang="en-US" sz="1000" dirty="0"/>
           </a:p>
           <a:p>
-            <a:pPr indent="0" marL="0">
+            <a:pPr marL="0" indent="0">
               <a:buNone/>
             </a:pPr>
             <a:r>
@@ -7917,7 +8137,7 @@
             <a:endParaRPr lang="en-US" sz="1000" dirty="0"/>
           </a:p>
           <a:p>
-            <a:pPr indent="0" marL="0">
+            <a:pPr marL="0" indent="0">
               <a:buNone/>
             </a:pPr>
             <a:r>
@@ -7951,6 +8171,7 @@
         <a:solidFill>
           <a:srgbClr val="FFFFFF"/>
         </a:solidFill>
+        <a:effectLst/>
       </p:bgPr>
     </p:bg>
     <p:spTree>
@@ -7986,6 +8207,13 @@
           </a:solidFill>
           <a:ln/>
         </p:spPr>
+        <p:txBody>
+          <a:bodyPr/>
+          <a:lstStyle/>
+          <a:p>
+            <a:endParaRPr lang="en-GB"/>
+          </a:p>
+        </p:txBody>
       </p:sp>
       <p:sp>
         <p:nvSpPr>
@@ -8008,7 +8236,7 @@
           <a:bodyPr wrap="square" lIns="0" tIns="0" rIns="0" bIns="0" rtlCol="0" anchor="ctr"/>
           <a:lstStyle/>
           <a:p>
-            <a:pPr indent="0" marL="0">
+            <a:pPr marL="0" indent="0">
               <a:buNone/>
             </a:pPr>
             <a:r>
@@ -8028,14 +8256,14 @@
       </p:sp>
       <p:pic>
         <p:nvPicPr>
-          <p:cNvPr id="4" name="Image 0" descr="preencoded.png">    </p:cNvPr>
+          <p:cNvPr id="4" name="Image 0" descr="preencoded.png"/>
           <p:cNvPicPr>
             <a:picLocks noChangeAspect="1"/>
           </p:cNvPicPr>
           <p:nvPr/>
         </p:nvPicPr>
         <p:blipFill>
-          <a:blip r:embed="rId1"/>
+          <a:blip r:embed="rId3"/>
           <a:stretch>
             <a:fillRect/>
           </a:stretch>
@@ -8052,14 +8280,14 @@
       </p:pic>
       <p:pic>
         <p:nvPicPr>
-          <p:cNvPr id="5" name="Image 1" descr="preencoded.png">    </p:cNvPr>
+          <p:cNvPr id="5" name="Image 1" descr="preencoded.png"/>
           <p:cNvPicPr>
             <a:picLocks noChangeAspect="1"/>
           </p:cNvPicPr>
           <p:nvPr/>
         </p:nvPicPr>
         <p:blipFill>
-          <a:blip r:embed="rId2"/>
+          <a:blip r:embed="rId4"/>
           <a:stretch>
             <a:fillRect/>
           </a:stretch>
@@ -8093,13 +8321,20 @@
           </a:solidFill>
           <a:ln/>
           <a:effectLst>
-            <a:outerShdw sx="100000" sy="100000" kx="0" ky="0" algn="bl" rotWithShape="0" blurRad="76200" dist="25400" dir="8100000">
+            <a:outerShdw blurRad="76200" dist="25400" dir="8100000" algn="bl" rotWithShape="0">
               <a:srgbClr val="000000">
                 <a:alpha val="12000"/>
               </a:srgbClr>
             </a:outerShdw>
           </a:effectLst>
         </p:spPr>
+        <p:txBody>
+          <a:bodyPr/>
+          <a:lstStyle/>
+          <a:p>
+            <a:endParaRPr lang="en-GB"/>
+          </a:p>
+        </p:txBody>
       </p:sp>
       <p:sp>
         <p:nvSpPr>
@@ -8122,7 +8357,7 @@
           <a:bodyPr wrap="square" lIns="0" tIns="0" rIns="0" bIns="0" rtlCol="0" anchor="ctr"/>
           <a:lstStyle/>
           <a:p>
-            <a:pPr indent="0" marL="0">
+            <a:pPr marL="0" indent="0">
               <a:buNone/>
             </a:pPr>
             <a:r>
@@ -8177,7 +8412,7 @@
                 <a:ea typeface="Calibri" pitchFamily="34" charset="-122"/>
                 <a:cs typeface="Calibri" pitchFamily="34" charset="-120"/>
               </a:rPr>
-              <a:t>R² scores look great (0.97+) — but that's partly because we use yesterday's price to predict today's</a:t>
+              <a:t>R² scores look great (0.97+), but that's partly because we use yesterday's price to predict today's</a:t>
             </a:r>
             <a:endParaRPr lang="en-US" sz="950" dirty="0"/>
           </a:p>
@@ -8219,7 +8454,7 @@
                 <a:ea typeface="Calibri" pitchFamily="34" charset="-122"/>
                 <a:cs typeface="Calibri" pitchFamily="34" charset="-120"/>
               </a:rPr>
-              <a:t>RMSE tells the real story — error is bigger for expensive stocks (COMI, SWDY)</a:t>
+              <a:t>RMSE tells the real story, error is bigger for expensive stocks (COMI, SWDY)</a:t>
             </a:r>
             <a:endParaRPr lang="en-US" sz="950" dirty="0"/>
           </a:p>
@@ -8547,4 +8782,319 @@
     </a:ext>
   </a:extLst>
 </a:theme>
+</file>
+
+<file path=ppt/theme/theme2.xml><?xml version="1.0" encoding="utf-8"?>
+<a:theme xmlns:a="http://schemas.openxmlformats.org/drawingml/2006/main" name="Office Theme">
+  <a:themeElements>
+    <a:clrScheme name="Office">
+      <a:dk1>
+        <a:sysClr val="windowText" lastClr="000000"/>
+      </a:dk1>
+      <a:lt1>
+        <a:sysClr val="window" lastClr="FFFFFF"/>
+      </a:lt1>
+      <a:dk2>
+        <a:srgbClr val="0E2841"/>
+      </a:dk2>
+      <a:lt2>
+        <a:srgbClr val="E8E8E8"/>
+      </a:lt2>
+      <a:accent1>
+        <a:srgbClr val="156082"/>
+      </a:accent1>
+      <a:accent2>
+        <a:srgbClr val="E97132"/>
+      </a:accent2>
+      <a:accent3>
+        <a:srgbClr val="196B24"/>
+      </a:accent3>
+      <a:accent4>
+        <a:srgbClr val="0F9ED5"/>
+      </a:accent4>
+      <a:accent5>
+        <a:srgbClr val="A02B93"/>
+      </a:accent5>
+      <a:accent6>
+        <a:srgbClr val="4EA72E"/>
+      </a:accent6>
+      <a:hlink>
+        <a:srgbClr val="467886"/>
+      </a:hlink>
+      <a:folHlink>
+        <a:srgbClr val="96607D"/>
+      </a:folHlink>
+    </a:clrScheme>
+    <a:fontScheme name="Office">
+      <a:majorFont>
+        <a:latin typeface="Aptos Display" panose="02110004020202020204"/>
+        <a:ea typeface=""/>
+        <a:cs typeface=""/>
+        <a:font script="Jpan" typeface="游ゴシック Light"/>
+        <a:font script="Hang" typeface="맑은 고딕"/>
+        <a:font script="Hans" typeface="等线 Light"/>
+        <a:font script="Hant" typeface="新細明體"/>
+        <a:font script="Arab" typeface="Times New Roman"/>
+        <a:font script="Hebr" typeface="Times New Roman"/>
+        <a:font script="Thai" typeface="Angsana New"/>
+        <a:font script="Ethi" typeface="Nyala"/>
+        <a:font script="Beng" typeface="Vrinda"/>
+        <a:font script="Gujr" typeface="Shruti"/>
+        <a:font script="Khmr" typeface="MoolBoran"/>
+        <a:font script="Knda" typeface="Tunga"/>
+        <a:font script="Guru" typeface="Raavi"/>
+        <a:font script="Cans" typeface="Euphemia"/>
+        <a:font script="Cher" typeface="Plantagenet Cherokee"/>
+        <a:font script="Yiii" typeface="Microsoft Yi Baiti"/>
+        <a:font script="Tibt" typeface="Microsoft Himalaya"/>
+        <a:font script="Thaa" typeface="MV Boli"/>
+        <a:font script="Deva" typeface="Mangal"/>
+        <a:font script="Telu" typeface="Gautami"/>
+        <a:font script="Taml" typeface="Latha"/>
+        <a:font script="Syrc" typeface="Estrangelo Edessa"/>
+        <a:font script="Orya" typeface="Kalinga"/>
+        <a:font script="Mlym" typeface="Kartika"/>
+        <a:font script="Laoo" typeface="DokChampa"/>
+        <a:font script="Sinh" typeface="Iskoola Pota"/>
+        <a:font script="Mong" typeface="Mongolian Baiti"/>
+        <a:font script="Viet" typeface="Times New Roman"/>
+        <a:font script="Uigh" typeface="Microsoft Uighur"/>
+        <a:font script="Geor" typeface="Sylfaen"/>
+        <a:font script="Armn" typeface="Arial"/>
+        <a:font script="Bugi" typeface="Leelawadee UI"/>
+        <a:font script="Bopo" typeface="Microsoft JhengHei"/>
+        <a:font script="Java" typeface="Javanese Text"/>
+        <a:font script="Lisu" typeface="Segoe UI"/>
+        <a:font script="Mymr" typeface="Myanmar Text"/>
+        <a:font script="Nkoo" typeface="Ebrima"/>
+        <a:font script="Olck" typeface="Nirmala UI"/>
+        <a:font script="Osma" typeface="Ebrima"/>
+        <a:font script="Phag" typeface="Phagspa"/>
+        <a:font script="Syrn" typeface="Estrangelo Edessa"/>
+        <a:font script="Syrj" typeface="Estrangelo Edessa"/>
+        <a:font script="Syre" typeface="Estrangelo Edessa"/>
+        <a:font script="Sora" typeface="Nirmala UI"/>
+        <a:font script="Tale" typeface="Microsoft Tai Le"/>
+        <a:font script="Talu" typeface="Microsoft New Tai Lue"/>
+        <a:font script="Tfng" typeface="Ebrima"/>
+      </a:majorFont>
+      <a:minorFont>
+        <a:latin typeface="Aptos" panose="02110004020202020204"/>
+        <a:ea typeface=""/>
+        <a:cs typeface=""/>
+        <a:font script="Jpan" typeface="游ゴシック"/>
+        <a:font script="Hang" typeface="맑은 고딕"/>
+        <a:font script="Hans" typeface="等线"/>
+        <a:font script="Hant" typeface="新細明體"/>
+        <a:font script="Arab" typeface="Arial"/>
+        <a:font script="Hebr" typeface="Arial"/>
+        <a:font script="Thai" typeface="Cordia New"/>
+        <a:font script="Ethi" typeface="Nyala"/>
+        <a:font script="Beng" typeface="Vrinda"/>
+        <a:font script="Gujr" typeface="Shruti"/>
+        <a:font script="Khmr" typeface="DaunPenh"/>
+        <a:font script="Knda" typeface="Tunga"/>
+        <a:font script="Guru" typeface="Raavi"/>
+        <a:font script="Cans" typeface="Euphemia"/>
+        <a:font script="Cher" typeface="Plantagenet Cherokee"/>
+        <a:font script="Yiii" typeface="Microsoft Yi Baiti"/>
+        <a:font script="Tibt" typeface="Microsoft Himalaya"/>
+        <a:font script="Thaa" typeface="MV Boli"/>
+        <a:font script="Deva" typeface="Mangal"/>
+        <a:font script="Telu" typeface="Gautami"/>
+        <a:font script="Taml" typeface="Latha"/>
+        <a:font script="Syrc" typeface="Estrangelo Edessa"/>
+        <a:font script="Orya" typeface="Kalinga"/>
+        <a:font script="Mlym" typeface="Kartika"/>
+        <a:font script="Laoo" typeface="DokChampa"/>
+        <a:font script="Sinh" typeface="Iskoola Pota"/>
+        <a:font script="Mong" typeface="Mongolian Baiti"/>
+        <a:font script="Viet" typeface="Arial"/>
+        <a:font script="Uigh" typeface="Microsoft Uighur"/>
+        <a:font script="Geor" typeface="Sylfaen"/>
+        <a:font script="Armn" typeface="Arial"/>
+        <a:font script="Bugi" typeface="Leelawadee UI"/>
+        <a:font script="Bopo" typeface="Microsoft JhengHei"/>
+        <a:font script="Java" typeface="Javanese Text"/>
+        <a:font script="Lisu" typeface="Segoe UI"/>
+        <a:font script="Mymr" typeface="Myanmar Text"/>
+        <a:font script="Nkoo" typeface="Ebrima"/>
+        <a:font script="Olck" typeface="Nirmala UI"/>
+        <a:font script="Osma" typeface="Ebrima"/>
+        <a:font script="Phag" typeface="Phagspa"/>
+        <a:font script="Syrn" typeface="Estrangelo Edessa"/>
+        <a:font script="Syrj" typeface="Estrangelo Edessa"/>
+        <a:font script="Syre" typeface="Estrangelo Edessa"/>
+        <a:font script="Sora" typeface="Nirmala UI"/>
+        <a:font script="Tale" typeface="Microsoft Tai Le"/>
+        <a:font script="Talu" typeface="Microsoft New Tai Lue"/>
+        <a:font script="Tfng" typeface="Ebrima"/>
+      </a:minorFont>
+    </a:fontScheme>
+    <a:fmtScheme name="Office">
+      <a:fillStyleLst>
+        <a:solidFill>
+          <a:schemeClr val="phClr"/>
+        </a:solidFill>
+        <a:gradFill rotWithShape="1">
+          <a:gsLst>
+            <a:gs pos="0">
+              <a:schemeClr val="phClr">
+                <a:lumMod val="110000"/>
+                <a:satMod val="105000"/>
+                <a:tint val="67000"/>
+              </a:schemeClr>
+            </a:gs>
+            <a:gs pos="50000">
+              <a:schemeClr val="phClr">
+                <a:lumMod val="105000"/>
+                <a:satMod val="103000"/>
+                <a:tint val="73000"/>
+              </a:schemeClr>
+            </a:gs>
+            <a:gs pos="100000">
+              <a:schemeClr val="phClr">
+                <a:lumMod val="105000"/>
+                <a:satMod val="109000"/>
+                <a:tint val="81000"/>
+              </a:schemeClr>
+            </a:gs>
+          </a:gsLst>
+          <a:lin ang="5400000" scaled="0"/>
+        </a:gradFill>
+        <a:gradFill rotWithShape="1">
+          <a:gsLst>
+            <a:gs pos="0">
+              <a:schemeClr val="phClr">
+                <a:satMod val="103000"/>
+                <a:lumMod val="102000"/>
+                <a:tint val="94000"/>
+              </a:schemeClr>
+            </a:gs>
+            <a:gs pos="50000">
+              <a:schemeClr val="phClr">
+                <a:satMod val="110000"/>
+                <a:lumMod val="100000"/>
+                <a:shade val="100000"/>
+              </a:schemeClr>
+            </a:gs>
+            <a:gs pos="100000">
+              <a:schemeClr val="phClr">
+                <a:lumMod val="99000"/>
+                <a:satMod val="120000"/>
+                <a:shade val="78000"/>
+              </a:schemeClr>
+            </a:gs>
+          </a:gsLst>
+          <a:lin ang="5400000" scaled="0"/>
+        </a:gradFill>
+      </a:fillStyleLst>
+      <a:lnStyleLst>
+        <a:ln w="12700" cap="flat" cmpd="sng" algn="ctr">
+          <a:solidFill>
+            <a:schemeClr val="phClr"/>
+          </a:solidFill>
+          <a:prstDash val="solid"/>
+          <a:miter lim="800000"/>
+        </a:ln>
+        <a:ln w="19050" cap="flat" cmpd="sng" algn="ctr">
+          <a:solidFill>
+            <a:schemeClr val="phClr"/>
+          </a:solidFill>
+          <a:prstDash val="solid"/>
+          <a:miter lim="800000"/>
+        </a:ln>
+        <a:ln w="25400" cap="flat" cmpd="sng" algn="ctr">
+          <a:solidFill>
+            <a:schemeClr val="phClr"/>
+          </a:solidFill>
+          <a:prstDash val="solid"/>
+          <a:miter lim="800000"/>
+        </a:ln>
+      </a:lnStyleLst>
+      <a:effectStyleLst>
+        <a:effectStyle>
+          <a:effectLst/>
+        </a:effectStyle>
+        <a:effectStyle>
+          <a:effectLst/>
+        </a:effectStyle>
+        <a:effectStyle>
+          <a:effectLst>
+            <a:outerShdw blurRad="57150" dist="19050" dir="5400000" algn="ctr" rotWithShape="0">
+              <a:srgbClr val="000000">
+                <a:alpha val="63000"/>
+              </a:srgbClr>
+            </a:outerShdw>
+          </a:effectLst>
+        </a:effectStyle>
+      </a:effectStyleLst>
+      <a:bgFillStyleLst>
+        <a:solidFill>
+          <a:schemeClr val="phClr"/>
+        </a:solidFill>
+        <a:solidFill>
+          <a:schemeClr val="phClr">
+            <a:tint val="95000"/>
+            <a:satMod val="170000"/>
+          </a:schemeClr>
+        </a:solidFill>
+        <a:gradFill rotWithShape="1">
+          <a:gsLst>
+            <a:gs pos="0">
+              <a:schemeClr val="phClr">
+                <a:tint val="93000"/>
+                <a:satMod val="150000"/>
+                <a:shade val="98000"/>
+                <a:lumMod val="102000"/>
+              </a:schemeClr>
+            </a:gs>
+            <a:gs pos="50000">
+              <a:schemeClr val="phClr">
+                <a:tint val="98000"/>
+                <a:satMod val="130000"/>
+                <a:shade val="90000"/>
+                <a:lumMod val="103000"/>
+              </a:schemeClr>
+            </a:gs>
+            <a:gs pos="100000">
+              <a:schemeClr val="phClr">
+                <a:shade val="63000"/>
+                <a:satMod val="120000"/>
+              </a:schemeClr>
+            </a:gs>
+          </a:gsLst>
+          <a:lin ang="5400000" scaled="0"/>
+        </a:gradFill>
+      </a:bgFillStyleLst>
+    </a:fmtScheme>
+  </a:themeElements>
+  <a:objectDefaults>
+    <a:lnDef>
+      <a:spPr/>
+      <a:bodyPr/>
+      <a:lstStyle/>
+      <a:style>
+        <a:lnRef idx="2">
+          <a:schemeClr val="accent1"/>
+        </a:lnRef>
+        <a:fillRef idx="0">
+          <a:schemeClr val="accent1"/>
+        </a:fillRef>
+        <a:effectRef idx="1">
+          <a:schemeClr val="accent1"/>
+        </a:effectRef>
+        <a:fontRef idx="minor">
+          <a:schemeClr val="tx1"/>
+        </a:fontRef>
+      </a:style>
+    </a:lnDef>
+  </a:objectDefaults>
+  <a:extraClrSchemeLst/>
+  <a:extLst>
+    <a:ext uri="{05A4C25C-085E-4340-85A3-A5531E510DB2}">
+      <thm15:themeFamily xmlns:thm15="http://schemas.microsoft.com/office/thememl/2012/main" name="Office Theme" id="{2E142A2C-CD16-42D6-873A-C26D2A0506FA}" vid="{1BDDFF52-6CD6-40A5-AB3C-68EB2F1E4D0A}"/>
+    </a:ext>
+  </a:extLst>
+</a:theme>
 </file>
--- a/EGX30_Presentation_Final.pptx
+++ b/EGX30_Presentation_Final.pptx
@@ -5,7 +5,7 @@
     <p:sldMasterId id="2147483648" r:id="rId1"/>
   </p:sldMasterIdLst>
   <p:notesMasterIdLst>
-    <p:notesMasterId r:id="rId12"/>
+    <p:notesMasterId r:id="rId11"/>
   </p:notesMasterIdLst>
   <p:sldIdLst>
     <p:sldId id="256" r:id="rId2"/>
@@ -16,8 +16,7 @@
     <p:sldId id="261" r:id="rId7"/>
     <p:sldId id="262" r:id="rId8"/>
     <p:sldId id="263" r:id="rId9"/>
-    <p:sldId id="264" r:id="rId10"/>
-    <p:sldId id="265" r:id="rId11"/>
+    <p:sldId id="265" r:id="rId10"/>
   </p:sldIdLst>
   <p:sldSz cx="9144000" cy="5143500" type="screen16x9"/>
   <p:notesSz cx="5143500" cy="9144000"/>
@@ -312,90 +311,6 @@
             <a:fld id="{F7021451-1387-4CA6-816F-3879F97B5CBC}" type="slidenum">
               <a:rPr lang="en-US"/>
               <a:t>1</a:t>
-            </a:fld>
-            <a:endParaRPr lang="en-US"/>
-          </a:p>
-        </p:txBody>
-      </p:sp>
-    </p:spTree>
-    <p:extLst>
-      <p:ext uri="{BB962C8B-B14F-4D97-AF65-F5344CB8AC3E}">
-        <p14:creationId xmlns:p14="http://schemas.microsoft.com/office/powerpoint/2010/main" val="1024086991"/>
-      </p:ext>
-    </p:extLst>
-  </p:cSld>
-  <p:clrMapOvr>
-    <a:masterClrMapping/>
-  </p:clrMapOvr>
-</p:notes>
-</file>
-
-<file path=ppt/notesSlides/notesSlide10.xml><?xml version="1.0" encoding="utf-8"?>
-<p:notes xmlns:a="http://schemas.openxmlformats.org/drawingml/2006/main" xmlns:r="http://schemas.openxmlformats.org/officeDocument/2006/relationships" xmlns:p="http://schemas.openxmlformats.org/presentationml/2006/main">
-  <p:cSld>
-    <p:spTree>
-      <p:nvGrpSpPr>
-        <p:cNvPr id="1" name=""/>
-        <p:cNvGrpSpPr/>
-        <p:nvPr/>
-      </p:nvGrpSpPr>
-      <p:grpSpPr>
-        <a:xfrm>
-          <a:off x="0" y="0"/>
-          <a:ext cx="0" cy="0"/>
-          <a:chOff x="0" y="0"/>
-          <a:chExt cx="0" cy="0"/>
-        </a:xfrm>
-      </p:grpSpPr>
-      <p:sp>
-        <p:nvSpPr>
-          <p:cNvPr id="2" name="Slide Image Placeholder 1"/>
-          <p:cNvSpPr>
-            <a:spLocks noGrp="1" noRot="1" noChangeAspect="1"/>
-          </p:cNvSpPr>
-          <p:nvPr>
-            <p:ph type="sldImg"/>
-          </p:nvPr>
-        </p:nvSpPr>
-        <p:spPr/>
-      </p:sp>
-      <p:sp>
-        <p:nvSpPr>
-          <p:cNvPr id="3" name="Notes Placeholder 2"/>
-          <p:cNvSpPr>
-            <a:spLocks noGrp="1"/>
-          </p:cNvSpPr>
-          <p:nvPr>
-            <p:ph type="body" idx="1"/>
-          </p:nvPr>
-        </p:nvSpPr>
-        <p:spPr/>
-        <p:txBody>
-          <a:bodyPr/>
-          <a:lstStyle/>
-          <a:p>
-            <a:endParaRPr lang="en-US" dirty="0"/>
-          </a:p>
-        </p:txBody>
-      </p:sp>
-      <p:sp>
-        <p:nvSpPr>
-          <p:cNvPr id="4" name="Slide Number Placeholder 3"/>
-          <p:cNvSpPr>
-            <a:spLocks noGrp="1"/>
-          </p:cNvSpPr>
-          <p:nvPr>
-            <p:ph type="sldNum" sz="quarter" idx="10"/>
-          </p:nvPr>
-        </p:nvSpPr>
-        <p:spPr/>
-        <p:txBody>
-          <a:bodyPr/>
-          <a:lstStyle/>
-          <a:p>
-            <a:fld id="{F7021451-1387-4CA6-816F-3879F97B5CBC}" type="slidenum">
-              <a:rPr lang="en-US"/>
-              <a:t>10</a:t>
             </a:fld>
             <a:endParaRPr lang="en-US"/>
           </a:p>
@@ -1512,7 +1427,7 @@
                 <a:ea typeface="Trebuchet MS" pitchFamily="34" charset="-122"/>
                 <a:cs typeface="Trebuchet MS" pitchFamily="34" charset="-120"/>
               </a:rPr>
-              <a:t>Predictive Analysis of</a:t>
+              <a:t>Data Analysis of</a:t>
             </a:r>
             <a:endParaRPr lang="en-US" sz="2000" dirty="0"/>
           </a:p>
@@ -1710,940 +1625,6 @@
               <a:t>Egypt University of Informatics - Data Analysis - Spring 2026</a:t>
             </a:r>
             <a:endParaRPr lang="en-US" sz="1000" dirty="0"/>
-          </a:p>
-        </p:txBody>
-      </p:sp>
-    </p:spTree>
-  </p:cSld>
-  <p:clrMapOvr>
-    <a:masterClrMapping/>
-  </p:clrMapOvr>
-</p:sld>
-</file>
-
-<file path=ppt/slides/slide10.xml><?xml version="1.0" encoding="utf-8"?>
-<p:sld xmlns:a="http://schemas.openxmlformats.org/drawingml/2006/main" xmlns:r="http://schemas.openxmlformats.org/officeDocument/2006/relationships" xmlns:p="http://schemas.openxmlformats.org/presentationml/2006/main">
-  <p:cSld name="Slide 10">
-    <p:bg>
-      <p:bgPr>
-        <a:solidFill>
-          <a:srgbClr val="0A1628"/>
-        </a:solidFill>
-        <a:effectLst/>
-      </p:bgPr>
-    </p:bg>
-    <p:spTree>
-      <p:nvGrpSpPr>
-        <p:cNvPr id="1" name=""/>
-        <p:cNvGrpSpPr/>
-        <p:nvPr/>
-      </p:nvGrpSpPr>
-      <p:grpSpPr>
-        <a:xfrm>
-          <a:off x="0" y="0"/>
-          <a:ext cx="0" cy="0"/>
-          <a:chOff x="0" y="0"/>
-          <a:chExt cx="0" cy="0"/>
-        </a:xfrm>
-      </p:grpSpPr>
-      <p:sp>
-        <p:nvSpPr>
-          <p:cNvPr id="2" name="Shape 0"/>
-          <p:cNvSpPr/>
-          <p:nvPr/>
-        </p:nvSpPr>
-        <p:spPr>
-          <a:xfrm>
-            <a:off x="0" y="0"/>
-            <a:ext cx="9144000" cy="54864"/>
-          </a:xfrm>
-          <a:prstGeom prst="rect">
-            <a:avLst/>
-          </a:prstGeom>
-          <a:solidFill>
-            <a:srgbClr val="22D3EE"/>
-          </a:solidFill>
-          <a:ln/>
-        </p:spPr>
-        <p:txBody>
-          <a:bodyPr/>
-          <a:lstStyle/>
-          <a:p>
-            <a:endParaRPr lang="en-GB"/>
-          </a:p>
-        </p:txBody>
-      </p:sp>
-      <p:sp>
-        <p:nvSpPr>
-          <p:cNvPr id="3" name="Text 1"/>
-          <p:cNvSpPr/>
-          <p:nvPr/>
-        </p:nvSpPr>
-        <p:spPr>
-          <a:xfrm>
-            <a:off x="457200" y="228600"/>
-            <a:ext cx="8229600" cy="457200"/>
-          </a:xfrm>
-          <a:prstGeom prst="rect">
-            <a:avLst/>
-          </a:prstGeom>
-          <a:noFill/>
-          <a:ln/>
-        </p:spPr>
-        <p:txBody>
-          <a:bodyPr wrap="square" lIns="0" tIns="0" rIns="0" bIns="0" rtlCol="0" anchor="ctr"/>
-          <a:lstStyle/>
-          <a:p>
-            <a:pPr marL="0" indent="0">
-              <a:buNone/>
-            </a:pPr>
-            <a:r>
-              <a:rPr lang="en-US" sz="2600" b="1" dirty="0">
-                <a:solidFill>
-                  <a:srgbClr val="FFFFFF"/>
-                </a:solidFill>
-                <a:latin typeface="Trebuchet MS" pitchFamily="34" charset="0"/>
-                <a:ea typeface="Trebuchet MS" pitchFamily="34" charset="-122"/>
-                <a:cs typeface="Trebuchet MS" pitchFamily="34" charset="-120"/>
-              </a:rPr>
-              <a:t>The Full Picture</a:t>
-            </a:r>
-            <a:endParaRPr lang="en-US" sz="2600" dirty="0"/>
-          </a:p>
-        </p:txBody>
-      </p:sp>
-      <p:sp>
-        <p:nvSpPr>
-          <p:cNvPr id="4" name="Shape 2"/>
-          <p:cNvSpPr/>
-          <p:nvPr/>
-        </p:nvSpPr>
-        <p:spPr>
-          <a:xfrm>
-            <a:off x="457200" y="868680"/>
-            <a:ext cx="8229600" cy="777240"/>
-          </a:xfrm>
-          <a:prstGeom prst="rect">
-            <a:avLst/>
-          </a:prstGeom>
-          <a:solidFill>
-            <a:srgbClr val="0D2847"/>
-          </a:solidFill>
-          <a:ln/>
-        </p:spPr>
-        <p:txBody>
-          <a:bodyPr/>
-          <a:lstStyle/>
-          <a:p>
-            <a:endParaRPr lang="en-GB"/>
-          </a:p>
-        </p:txBody>
-      </p:sp>
-      <p:sp>
-        <p:nvSpPr>
-          <p:cNvPr id="5" name="Shape 3"/>
-          <p:cNvSpPr/>
-          <p:nvPr/>
-        </p:nvSpPr>
-        <p:spPr>
-          <a:xfrm>
-            <a:off x="457200" y="868680"/>
-            <a:ext cx="54864" cy="777240"/>
-          </a:xfrm>
-          <a:prstGeom prst="rect">
-            <a:avLst/>
-          </a:prstGeom>
-          <a:solidFill>
-            <a:srgbClr val="10B981"/>
-          </a:solidFill>
-          <a:ln/>
-        </p:spPr>
-        <p:txBody>
-          <a:bodyPr/>
-          <a:lstStyle/>
-          <a:p>
-            <a:endParaRPr lang="en-GB"/>
-          </a:p>
-        </p:txBody>
-      </p:sp>
-      <p:sp>
-        <p:nvSpPr>
-          <p:cNvPr id="6" name="Shape 4"/>
-          <p:cNvSpPr/>
-          <p:nvPr/>
-        </p:nvSpPr>
-        <p:spPr>
-          <a:xfrm>
-            <a:off x="640080" y="978408"/>
-            <a:ext cx="347472" cy="347472"/>
-          </a:xfrm>
-          <a:prstGeom prst="ellipse">
-            <a:avLst/>
-          </a:prstGeom>
-          <a:solidFill>
-            <a:srgbClr val="10B981"/>
-          </a:solidFill>
-          <a:ln/>
-        </p:spPr>
-        <p:txBody>
-          <a:bodyPr/>
-          <a:lstStyle/>
-          <a:p>
-            <a:endParaRPr lang="en-GB"/>
-          </a:p>
-        </p:txBody>
-      </p:sp>
-      <p:sp>
-        <p:nvSpPr>
-          <p:cNvPr id="7" name="Text 5"/>
-          <p:cNvSpPr/>
-          <p:nvPr/>
-        </p:nvSpPr>
-        <p:spPr>
-          <a:xfrm>
-            <a:off x="640080" y="978408"/>
-            <a:ext cx="347472" cy="347472"/>
-          </a:xfrm>
-          <a:prstGeom prst="rect">
-            <a:avLst/>
-          </a:prstGeom>
-          <a:noFill/>
-          <a:ln/>
-        </p:spPr>
-        <p:txBody>
-          <a:bodyPr wrap="square" lIns="0" tIns="0" rIns="0" bIns="0" rtlCol="0" anchor="ctr"/>
-          <a:lstStyle/>
-          <a:p>
-            <a:pPr marL="0" indent="0" algn="ctr">
-              <a:buNone/>
-            </a:pPr>
-            <a:r>
-              <a:rPr lang="en-US" sz="1500" b="1" dirty="0">
-                <a:solidFill>
-                  <a:srgbClr val="FFFFFF"/>
-                </a:solidFill>
-                <a:latin typeface="Trebuchet MS" pitchFamily="34" charset="0"/>
-                <a:ea typeface="Trebuchet MS" pitchFamily="34" charset="-122"/>
-                <a:cs typeface="Trebuchet MS" pitchFamily="34" charset="-120"/>
-              </a:rPr>
-              <a:t>1</a:t>
-            </a:r>
-            <a:endParaRPr lang="en-US" sz="1500" dirty="0"/>
-          </a:p>
-        </p:txBody>
-      </p:sp>
-      <p:sp>
-        <p:nvSpPr>
-          <p:cNvPr id="8" name="Text 6"/>
-          <p:cNvSpPr/>
-          <p:nvPr/>
-        </p:nvSpPr>
-        <p:spPr>
-          <a:xfrm>
-            <a:off x="1143000" y="932688"/>
-            <a:ext cx="7315200" cy="274320"/>
-          </a:xfrm>
-          <a:prstGeom prst="rect">
-            <a:avLst/>
-          </a:prstGeom>
-          <a:noFill/>
-          <a:ln/>
-        </p:spPr>
-        <p:txBody>
-          <a:bodyPr wrap="square" lIns="0" tIns="0" rIns="0" bIns="0" rtlCol="0" anchor="ctr"/>
-          <a:lstStyle/>
-          <a:p>
-            <a:pPr marL="0" indent="0">
-              <a:buNone/>
-            </a:pPr>
-            <a:r>
-              <a:rPr lang="en-US" sz="1400" b="1" dirty="0">
-                <a:solidFill>
-                  <a:srgbClr val="10B981"/>
-                </a:solidFill>
-                <a:latin typeface="Trebuchet MS" pitchFamily="34" charset="0"/>
-                <a:ea typeface="Trebuchet MS" pitchFamily="34" charset="-122"/>
-                <a:cs typeface="Trebuchet MS" pitchFamily="34" charset="-120"/>
-              </a:rPr>
-              <a:t>The growth is real</a:t>
-            </a:r>
-            <a:endParaRPr lang="en-US" sz="1400" dirty="0"/>
-          </a:p>
-        </p:txBody>
-      </p:sp>
-      <p:sp>
-        <p:nvSpPr>
-          <p:cNvPr id="9" name="Text 7"/>
-          <p:cNvSpPr/>
-          <p:nvPr/>
-        </p:nvSpPr>
-        <p:spPr>
-          <a:xfrm>
-            <a:off x="1143000" y="1234440"/>
-            <a:ext cx="7315200" cy="365760"/>
-          </a:xfrm>
-          <a:prstGeom prst="rect">
-            <a:avLst/>
-          </a:prstGeom>
-          <a:noFill/>
-          <a:ln/>
-        </p:spPr>
-        <p:txBody>
-          <a:bodyPr wrap="square" lIns="0" tIns="0" rIns="0" bIns="0" rtlCol="0" anchor="ctr"/>
-          <a:lstStyle/>
-          <a:p>
-            <a:pPr marL="0" indent="0">
-              <a:buNone/>
-            </a:pPr>
-            <a:r>
-              <a:rPr lang="en-US" sz="1050" dirty="0">
-                <a:solidFill>
-                  <a:srgbClr val="E2E8F0"/>
-                </a:solidFill>
-                <a:latin typeface="Calibri" pitchFamily="34" charset="0"/>
-                <a:ea typeface="Calibri" pitchFamily="34" charset="-122"/>
-                <a:cs typeface="Calibri" pitchFamily="34" charset="-120"/>
-              </a:rPr>
-              <a:t>All 5 tested stocks rejected H₀, their upward trends are statistically significant, not random luck.</a:t>
-            </a:r>
-            <a:endParaRPr lang="en-US" sz="1050" dirty="0"/>
-          </a:p>
-        </p:txBody>
-      </p:sp>
-      <p:sp>
-        <p:nvSpPr>
-          <p:cNvPr id="10" name="Shape 8"/>
-          <p:cNvSpPr/>
-          <p:nvPr/>
-        </p:nvSpPr>
-        <p:spPr>
-          <a:xfrm>
-            <a:off x="457200" y="1783080"/>
-            <a:ext cx="8229600" cy="777240"/>
-          </a:xfrm>
-          <a:prstGeom prst="rect">
-            <a:avLst/>
-          </a:prstGeom>
-          <a:solidFill>
-            <a:srgbClr val="0D2847"/>
-          </a:solidFill>
-          <a:ln/>
-        </p:spPr>
-        <p:txBody>
-          <a:bodyPr/>
-          <a:lstStyle/>
-          <a:p>
-            <a:endParaRPr lang="en-GB"/>
-          </a:p>
-        </p:txBody>
-      </p:sp>
-      <p:sp>
-        <p:nvSpPr>
-          <p:cNvPr id="11" name="Shape 9"/>
-          <p:cNvSpPr/>
-          <p:nvPr/>
-        </p:nvSpPr>
-        <p:spPr>
-          <a:xfrm>
-            <a:off x="457200" y="1783080"/>
-            <a:ext cx="54864" cy="777240"/>
-          </a:xfrm>
-          <a:prstGeom prst="rect">
-            <a:avLst/>
-          </a:prstGeom>
-          <a:solidFill>
-            <a:srgbClr val="0891B2"/>
-          </a:solidFill>
-          <a:ln/>
-        </p:spPr>
-        <p:txBody>
-          <a:bodyPr/>
-          <a:lstStyle/>
-          <a:p>
-            <a:endParaRPr lang="en-GB"/>
-          </a:p>
-        </p:txBody>
-      </p:sp>
-      <p:sp>
-        <p:nvSpPr>
-          <p:cNvPr id="12" name="Shape 10"/>
-          <p:cNvSpPr/>
-          <p:nvPr/>
-        </p:nvSpPr>
-        <p:spPr>
-          <a:xfrm>
-            <a:off x="640080" y="1892808"/>
-            <a:ext cx="347472" cy="347472"/>
-          </a:xfrm>
-          <a:prstGeom prst="ellipse">
-            <a:avLst/>
-          </a:prstGeom>
-          <a:solidFill>
-            <a:srgbClr val="0891B2"/>
-          </a:solidFill>
-          <a:ln/>
-        </p:spPr>
-        <p:txBody>
-          <a:bodyPr/>
-          <a:lstStyle/>
-          <a:p>
-            <a:endParaRPr lang="en-GB"/>
-          </a:p>
-        </p:txBody>
-      </p:sp>
-      <p:sp>
-        <p:nvSpPr>
-          <p:cNvPr id="13" name="Text 11"/>
-          <p:cNvSpPr/>
-          <p:nvPr/>
-        </p:nvSpPr>
-        <p:spPr>
-          <a:xfrm>
-            <a:off x="640080" y="1892808"/>
-            <a:ext cx="347472" cy="347472"/>
-          </a:xfrm>
-          <a:prstGeom prst="rect">
-            <a:avLst/>
-          </a:prstGeom>
-          <a:noFill/>
-          <a:ln/>
-        </p:spPr>
-        <p:txBody>
-          <a:bodyPr wrap="square" lIns="0" tIns="0" rIns="0" bIns="0" rtlCol="0" anchor="ctr"/>
-          <a:lstStyle/>
-          <a:p>
-            <a:pPr marL="0" indent="0" algn="ctr">
-              <a:buNone/>
-            </a:pPr>
-            <a:r>
-              <a:rPr lang="en-US" sz="1500" b="1" dirty="0">
-                <a:solidFill>
-                  <a:srgbClr val="FFFFFF"/>
-                </a:solidFill>
-                <a:latin typeface="Trebuchet MS" pitchFamily="34" charset="0"/>
-                <a:ea typeface="Trebuchet MS" pitchFamily="34" charset="-122"/>
-                <a:cs typeface="Trebuchet MS" pitchFamily="34" charset="-120"/>
-              </a:rPr>
-              <a:t>2</a:t>
-            </a:r>
-            <a:endParaRPr lang="en-US" sz="1500" dirty="0"/>
-          </a:p>
-        </p:txBody>
-      </p:sp>
-      <p:sp>
-        <p:nvSpPr>
-          <p:cNvPr id="14" name="Text 12"/>
-          <p:cNvSpPr/>
-          <p:nvPr/>
-        </p:nvSpPr>
-        <p:spPr>
-          <a:xfrm>
-            <a:off x="1143000" y="1847088"/>
-            <a:ext cx="7315200" cy="274320"/>
-          </a:xfrm>
-          <a:prstGeom prst="rect">
-            <a:avLst/>
-          </a:prstGeom>
-          <a:noFill/>
-          <a:ln/>
-        </p:spPr>
-        <p:txBody>
-          <a:bodyPr wrap="square" lIns="0" tIns="0" rIns="0" bIns="0" rtlCol="0" anchor="ctr"/>
-          <a:lstStyle/>
-          <a:p>
-            <a:pPr marL="0" indent="0">
-              <a:buNone/>
-            </a:pPr>
-            <a:r>
-              <a:rPr lang="en-US" sz="1400" b="1" dirty="0">
-                <a:solidFill>
-                  <a:srgbClr val="0891B2"/>
-                </a:solidFill>
-                <a:latin typeface="Trebuchet MS" pitchFamily="34" charset="0"/>
-                <a:ea typeface="Trebuchet MS" pitchFamily="34" charset="-122"/>
-                <a:cs typeface="Trebuchet MS" pitchFamily="34" charset="-120"/>
-              </a:rPr>
-              <a:t>The whole market moves together</a:t>
-            </a:r>
-            <a:endParaRPr lang="en-US" sz="1400" dirty="0"/>
-          </a:p>
-        </p:txBody>
-      </p:sp>
-      <p:sp>
-        <p:nvSpPr>
-          <p:cNvPr id="15" name="Text 13"/>
-          <p:cNvSpPr/>
-          <p:nvPr/>
-        </p:nvSpPr>
-        <p:spPr>
-          <a:xfrm>
-            <a:off x="1143000" y="2148840"/>
-            <a:ext cx="7315200" cy="365760"/>
-          </a:xfrm>
-          <a:prstGeom prst="rect">
-            <a:avLst/>
-          </a:prstGeom>
-          <a:noFill/>
-          <a:ln/>
-        </p:spPr>
-        <p:txBody>
-          <a:bodyPr wrap="square" lIns="0" tIns="0" rIns="0" bIns="0" rtlCol="0" anchor="ctr"/>
-          <a:lstStyle/>
-          <a:p>
-            <a:pPr marL="0" indent="0">
-              <a:buNone/>
-            </a:pPr>
-            <a:r>
-              <a:rPr lang="en-US" sz="1050" dirty="0">
-                <a:solidFill>
-                  <a:srgbClr val="E2E8F0"/>
-                </a:solidFill>
-                <a:latin typeface="Calibri" pitchFamily="34" charset="0"/>
-                <a:ea typeface="Calibri" pitchFamily="34" charset="-122"/>
-                <a:cs typeface="Calibri" pitchFamily="34" charset="-120"/>
-              </a:rPr>
-              <a:t>No significant difference between sectors. When the Central Bank moves or the pound drops, every sector feels it equally.</a:t>
-            </a:r>
-            <a:endParaRPr lang="en-US" sz="1050" dirty="0"/>
-          </a:p>
-        </p:txBody>
-      </p:sp>
-      <p:sp>
-        <p:nvSpPr>
-          <p:cNvPr id="16" name="Shape 14"/>
-          <p:cNvSpPr/>
-          <p:nvPr/>
-        </p:nvSpPr>
-        <p:spPr>
-          <a:xfrm>
-            <a:off x="457200" y="2697480"/>
-            <a:ext cx="8229600" cy="777240"/>
-          </a:xfrm>
-          <a:prstGeom prst="rect">
-            <a:avLst/>
-          </a:prstGeom>
-          <a:solidFill>
-            <a:srgbClr val="0D2847"/>
-          </a:solidFill>
-          <a:ln/>
-        </p:spPr>
-        <p:txBody>
-          <a:bodyPr/>
-          <a:lstStyle/>
-          <a:p>
-            <a:endParaRPr lang="en-GB"/>
-          </a:p>
-        </p:txBody>
-      </p:sp>
-      <p:sp>
-        <p:nvSpPr>
-          <p:cNvPr id="17" name="Shape 15"/>
-          <p:cNvSpPr/>
-          <p:nvPr/>
-        </p:nvSpPr>
-        <p:spPr>
-          <a:xfrm>
-            <a:off x="457200" y="2697480"/>
-            <a:ext cx="54864" cy="777240"/>
-          </a:xfrm>
-          <a:prstGeom prst="rect">
-            <a:avLst/>
-          </a:prstGeom>
-          <a:solidFill>
-            <a:srgbClr val="EF4444"/>
-          </a:solidFill>
-          <a:ln/>
-        </p:spPr>
-        <p:txBody>
-          <a:bodyPr/>
-          <a:lstStyle/>
-          <a:p>
-            <a:endParaRPr lang="en-GB"/>
-          </a:p>
-        </p:txBody>
-      </p:sp>
-      <p:sp>
-        <p:nvSpPr>
-          <p:cNvPr id="18" name="Shape 16"/>
-          <p:cNvSpPr/>
-          <p:nvPr/>
-        </p:nvSpPr>
-        <p:spPr>
-          <a:xfrm>
-            <a:off x="640080" y="2807208"/>
-            <a:ext cx="347472" cy="347472"/>
-          </a:xfrm>
-          <a:prstGeom prst="ellipse">
-            <a:avLst/>
-          </a:prstGeom>
-          <a:solidFill>
-            <a:srgbClr val="EF4444"/>
-          </a:solidFill>
-          <a:ln/>
-        </p:spPr>
-        <p:txBody>
-          <a:bodyPr/>
-          <a:lstStyle/>
-          <a:p>
-            <a:endParaRPr lang="en-GB"/>
-          </a:p>
-        </p:txBody>
-      </p:sp>
-      <p:sp>
-        <p:nvSpPr>
-          <p:cNvPr id="19" name="Text 17"/>
-          <p:cNvSpPr/>
-          <p:nvPr/>
-        </p:nvSpPr>
-        <p:spPr>
-          <a:xfrm>
-            <a:off x="640080" y="2807208"/>
-            <a:ext cx="347472" cy="347472"/>
-          </a:xfrm>
-          <a:prstGeom prst="rect">
-            <a:avLst/>
-          </a:prstGeom>
-          <a:noFill/>
-          <a:ln/>
-        </p:spPr>
-        <p:txBody>
-          <a:bodyPr wrap="square" lIns="0" tIns="0" rIns="0" bIns="0" rtlCol="0" anchor="ctr"/>
-          <a:lstStyle/>
-          <a:p>
-            <a:pPr marL="0" indent="0" algn="ctr">
-              <a:buNone/>
-            </a:pPr>
-            <a:r>
-              <a:rPr lang="en-US" sz="1500" b="1" dirty="0">
-                <a:solidFill>
-                  <a:srgbClr val="FFFFFF"/>
-                </a:solidFill>
-                <a:latin typeface="Trebuchet MS" pitchFamily="34" charset="0"/>
-                <a:ea typeface="Trebuchet MS" pitchFamily="34" charset="-122"/>
-                <a:cs typeface="Trebuchet MS" pitchFamily="34" charset="-120"/>
-              </a:rPr>
-              <a:t>3</a:t>
-            </a:r>
-            <a:endParaRPr lang="en-US" sz="1500" dirty="0"/>
-          </a:p>
-        </p:txBody>
-      </p:sp>
-      <p:sp>
-        <p:nvSpPr>
-          <p:cNvPr id="20" name="Text 18"/>
-          <p:cNvSpPr/>
-          <p:nvPr/>
-        </p:nvSpPr>
-        <p:spPr>
-          <a:xfrm>
-            <a:off x="1143000" y="2761488"/>
-            <a:ext cx="7315200" cy="274320"/>
-          </a:xfrm>
-          <a:prstGeom prst="rect">
-            <a:avLst/>
-          </a:prstGeom>
-          <a:noFill/>
-          <a:ln/>
-        </p:spPr>
-        <p:txBody>
-          <a:bodyPr wrap="square" lIns="0" tIns="0" rIns="0" bIns="0" rtlCol="0" anchor="ctr"/>
-          <a:lstStyle/>
-          <a:p>
-            <a:pPr marL="0" indent="0">
-              <a:buNone/>
-            </a:pPr>
-            <a:r>
-              <a:rPr lang="en-US" sz="1400" b="1" dirty="0">
-                <a:solidFill>
-                  <a:srgbClr val="EF4444"/>
-                </a:solidFill>
-                <a:latin typeface="Trebuchet MS" pitchFamily="34" charset="0"/>
-                <a:ea typeface="Trebuchet MS" pitchFamily="34" charset="-122"/>
-                <a:cs typeface="Trebuchet MS" pitchFamily="34" charset="-120"/>
-              </a:rPr>
-              <a:t>Devaluations hit everyone</a:t>
-            </a:r>
-            <a:endParaRPr lang="en-US" sz="1400" dirty="0"/>
-          </a:p>
-        </p:txBody>
-      </p:sp>
-      <p:sp>
-        <p:nvSpPr>
-          <p:cNvPr id="21" name="Text 19"/>
-          <p:cNvSpPr/>
-          <p:nvPr/>
-        </p:nvSpPr>
-        <p:spPr>
-          <a:xfrm>
-            <a:off x="1143000" y="3063240"/>
-            <a:ext cx="7315200" cy="365760"/>
-          </a:xfrm>
-          <a:prstGeom prst="rect">
-            <a:avLst/>
-          </a:prstGeom>
-          <a:noFill/>
-          <a:ln/>
-        </p:spPr>
-        <p:txBody>
-          <a:bodyPr wrap="square" lIns="0" tIns="0" rIns="0" bIns="0" rtlCol="0" anchor="ctr"/>
-          <a:lstStyle/>
-          <a:p>
-            <a:pPr marL="0" indent="0">
-              <a:buNone/>
-            </a:pPr>
-            <a:r>
-              <a:rPr lang="en-US" sz="1050" dirty="0">
-                <a:solidFill>
-                  <a:srgbClr val="E2E8F0"/>
-                </a:solidFill>
-                <a:latin typeface="Calibri" pitchFamily="34" charset="0"/>
-                <a:ea typeface="Calibri" pitchFamily="34" charset="-122"/>
-                <a:cs typeface="Calibri" pitchFamily="34" charset="-120"/>
-              </a:rPr>
-              <a:t>All three EGP devaluations caused volatility spikes across all stocks. Jan 2024 was the biggest shock — daily swings doubled overnight.</a:t>
-            </a:r>
-            <a:endParaRPr lang="en-US" sz="1050" dirty="0"/>
-          </a:p>
-        </p:txBody>
-      </p:sp>
-      <p:sp>
-        <p:nvSpPr>
-          <p:cNvPr id="22" name="Shape 20"/>
-          <p:cNvSpPr/>
-          <p:nvPr/>
-        </p:nvSpPr>
-        <p:spPr>
-          <a:xfrm>
-            <a:off x="457200" y="3611880"/>
-            <a:ext cx="8229600" cy="777240"/>
-          </a:xfrm>
-          <a:prstGeom prst="rect">
-            <a:avLst/>
-          </a:prstGeom>
-          <a:solidFill>
-            <a:srgbClr val="0D2847"/>
-          </a:solidFill>
-          <a:ln/>
-        </p:spPr>
-        <p:txBody>
-          <a:bodyPr/>
-          <a:lstStyle/>
-          <a:p>
-            <a:endParaRPr lang="en-GB"/>
-          </a:p>
-        </p:txBody>
-      </p:sp>
-      <p:sp>
-        <p:nvSpPr>
-          <p:cNvPr id="23" name="Shape 21"/>
-          <p:cNvSpPr/>
-          <p:nvPr/>
-        </p:nvSpPr>
-        <p:spPr>
-          <a:xfrm>
-            <a:off x="457200" y="3611880"/>
-            <a:ext cx="54864" cy="777240"/>
-          </a:xfrm>
-          <a:prstGeom prst="rect">
-            <a:avLst/>
-          </a:prstGeom>
-          <a:solidFill>
-            <a:srgbClr val="F59E0B"/>
-          </a:solidFill>
-          <a:ln/>
-        </p:spPr>
-        <p:txBody>
-          <a:bodyPr/>
-          <a:lstStyle/>
-          <a:p>
-            <a:endParaRPr lang="en-GB"/>
-          </a:p>
-        </p:txBody>
-      </p:sp>
-      <p:sp>
-        <p:nvSpPr>
-          <p:cNvPr id="24" name="Shape 22"/>
-          <p:cNvSpPr/>
-          <p:nvPr/>
-        </p:nvSpPr>
-        <p:spPr>
-          <a:xfrm>
-            <a:off x="640080" y="3721608"/>
-            <a:ext cx="347472" cy="347472"/>
-          </a:xfrm>
-          <a:prstGeom prst="ellipse">
-            <a:avLst/>
-          </a:prstGeom>
-          <a:solidFill>
-            <a:srgbClr val="F59E0B"/>
-          </a:solidFill>
-          <a:ln/>
-        </p:spPr>
-        <p:txBody>
-          <a:bodyPr/>
-          <a:lstStyle/>
-          <a:p>
-            <a:endParaRPr lang="en-GB"/>
-          </a:p>
-        </p:txBody>
-      </p:sp>
-      <p:sp>
-        <p:nvSpPr>
-          <p:cNvPr id="25" name="Text 23"/>
-          <p:cNvSpPr/>
-          <p:nvPr/>
-        </p:nvSpPr>
-        <p:spPr>
-          <a:xfrm>
-            <a:off x="640080" y="3721608"/>
-            <a:ext cx="347472" cy="347472"/>
-          </a:xfrm>
-          <a:prstGeom prst="rect">
-            <a:avLst/>
-          </a:prstGeom>
-          <a:noFill/>
-          <a:ln/>
-        </p:spPr>
-        <p:txBody>
-          <a:bodyPr wrap="square" lIns="0" tIns="0" rIns="0" bIns="0" rtlCol="0" anchor="ctr"/>
-          <a:lstStyle/>
-          <a:p>
-            <a:pPr marL="0" indent="0" algn="ctr">
-              <a:buNone/>
-            </a:pPr>
-            <a:r>
-              <a:rPr lang="en-US" sz="1500" b="1" dirty="0">
-                <a:solidFill>
-                  <a:srgbClr val="FFFFFF"/>
-                </a:solidFill>
-                <a:latin typeface="Trebuchet MS" pitchFamily="34" charset="0"/>
-                <a:ea typeface="Trebuchet MS" pitchFamily="34" charset="-122"/>
-                <a:cs typeface="Trebuchet MS" pitchFamily="34" charset="-120"/>
-              </a:rPr>
-              <a:t>4</a:t>
-            </a:r>
-            <a:endParaRPr lang="en-US" sz="1500" dirty="0"/>
-          </a:p>
-        </p:txBody>
-      </p:sp>
-      <p:sp>
-        <p:nvSpPr>
-          <p:cNvPr id="26" name="Text 24"/>
-          <p:cNvSpPr/>
-          <p:nvPr/>
-        </p:nvSpPr>
-        <p:spPr>
-          <a:xfrm>
-            <a:off x="1143000" y="3675888"/>
-            <a:ext cx="7315200" cy="274320"/>
-          </a:xfrm>
-          <a:prstGeom prst="rect">
-            <a:avLst/>
-          </a:prstGeom>
-          <a:noFill/>
-          <a:ln/>
-        </p:spPr>
-        <p:txBody>
-          <a:bodyPr wrap="square" lIns="0" tIns="0" rIns="0" bIns="0" rtlCol="0" anchor="ctr"/>
-          <a:lstStyle/>
-          <a:p>
-            <a:pPr marL="0" indent="0">
-              <a:buNone/>
-            </a:pPr>
-            <a:r>
-              <a:rPr lang="en-US" sz="1400" b="1" dirty="0">
-                <a:solidFill>
-                  <a:srgbClr val="F59E0B"/>
-                </a:solidFill>
-                <a:latin typeface="Trebuchet MS" pitchFamily="34" charset="0"/>
-                <a:ea typeface="Trebuchet MS" pitchFamily="34" charset="-122"/>
-                <a:cs typeface="Trebuchet MS" pitchFamily="34" charset="-120"/>
-              </a:rPr>
-              <a:t>Prediction has limits</a:t>
-            </a:r>
-            <a:endParaRPr lang="en-US" sz="1400" dirty="0"/>
-          </a:p>
-        </p:txBody>
-      </p:sp>
-      <p:sp>
-        <p:nvSpPr>
-          <p:cNvPr id="27" name="Text 25"/>
-          <p:cNvSpPr/>
-          <p:nvPr/>
-        </p:nvSpPr>
-        <p:spPr>
-          <a:xfrm>
-            <a:off x="1143000" y="3977640"/>
-            <a:ext cx="7315200" cy="365760"/>
-          </a:xfrm>
-          <a:prstGeom prst="rect">
-            <a:avLst/>
-          </a:prstGeom>
-          <a:noFill/>
-          <a:ln/>
-        </p:spPr>
-        <p:txBody>
-          <a:bodyPr wrap="square" lIns="0" tIns="0" rIns="0" bIns="0" rtlCol="0" anchor="ctr"/>
-          <a:lstStyle/>
-          <a:p>
-            <a:pPr marL="0" indent="0">
-              <a:buNone/>
-            </a:pPr>
-            <a:r>
-              <a:rPr lang="en-US" sz="1050" dirty="0">
-                <a:solidFill>
-                  <a:srgbClr val="E2E8F0"/>
-                </a:solidFill>
-                <a:latin typeface="Calibri" pitchFamily="34" charset="0"/>
-                <a:ea typeface="Calibri" pitchFamily="34" charset="-122"/>
-                <a:cs typeface="Calibri" pitchFamily="34" charset="-120"/>
-              </a:rPr>
-              <a:t>Linear regression tracks trends nicely (R² &gt; 0.97) but can't see sudden crashes coming. The model reads yesterday's newspaper.</a:t>
-            </a:r>
-            <a:endParaRPr lang="en-US" sz="1050" dirty="0"/>
-          </a:p>
-        </p:txBody>
-      </p:sp>
-      <p:sp>
-        <p:nvSpPr>
-          <p:cNvPr id="28" name="Text 26"/>
-          <p:cNvSpPr/>
-          <p:nvPr/>
-        </p:nvSpPr>
-        <p:spPr>
-          <a:xfrm>
-            <a:off x="457200" y="4498848"/>
-            <a:ext cx="8306114" cy="521208"/>
-          </a:xfrm>
-          <a:prstGeom prst="rect">
-            <a:avLst/>
-          </a:prstGeom>
-          <a:noFill/>
-          <a:ln/>
-        </p:spPr>
-        <p:txBody>
-          <a:bodyPr wrap="square" lIns="0" tIns="0" rIns="0" bIns="0" rtlCol="0" anchor="ctr"/>
-          <a:lstStyle/>
-          <a:p>
-            <a:pPr marL="0" indent="0">
-              <a:buNone/>
-            </a:pPr>
-            <a:r>
-              <a:rPr lang="en-US" sz="1000" i="1" dirty="0">
-                <a:solidFill>
-                  <a:schemeClr val="bg1"/>
-                </a:solidFill>
-                <a:latin typeface="Calibri" pitchFamily="34" charset="0"/>
-                <a:ea typeface="Calibri" pitchFamily="34" charset="-122"/>
-                <a:cs typeface="Calibri" pitchFamily="34" charset="-120"/>
-              </a:rPr>
-              <a:t>Bottom line: understanding macro events - especially currency policy - matters more than any technical indicator for navigating the Egyptian market.</a:t>
-            </a:r>
-            <a:endParaRPr lang="en-US" sz="1000" dirty="0">
-              <a:solidFill>
-                <a:schemeClr val="bg1"/>
-              </a:solidFill>
-            </a:endParaRPr>
           </a:p>
         </p:txBody>
       </p:sp>
@@ -8165,11 +7146,11 @@
 
 <file path=ppt/slides/slide9.xml><?xml version="1.0" encoding="utf-8"?>
 <p:sld xmlns:a="http://schemas.openxmlformats.org/drawingml/2006/main" xmlns:r="http://schemas.openxmlformats.org/officeDocument/2006/relationships" xmlns:p="http://schemas.openxmlformats.org/presentationml/2006/main">
-  <p:cSld name="Slide 9">
+  <p:cSld name="Slide 10">
     <p:bg>
       <p:bgPr>
         <a:solidFill>
-          <a:srgbClr val="FFFFFF"/>
+          <a:srgbClr val="0A1628"/>
         </a:solidFill>
         <a:effectLst/>
       </p:bgPr>
@@ -8203,7 +7184,7 @@
             <a:avLst/>
           </a:prstGeom>
           <a:solidFill>
-            <a:srgbClr val="0891B2"/>
+            <a:srgbClr val="22D3EE"/>
           </a:solidFill>
           <a:ln/>
         </p:spPr>
@@ -8223,7 +7204,7 @@
         </p:nvSpPr>
         <p:spPr>
           <a:xfrm>
-            <a:off x="457200" y="182880"/>
+            <a:off x="457200" y="228600"/>
             <a:ext cx="8229600" cy="457200"/>
           </a:xfrm>
           <a:prstGeom prst="rect">
@@ -8240,93 +7221,38 @@
               <a:buNone/>
             </a:pPr>
             <a:r>
-              <a:rPr lang="en-US" sz="2400" b="1" dirty="0">
-                <a:solidFill>
-                  <a:srgbClr val="1E293B"/>
+              <a:rPr lang="en-US" sz="2600" b="1" dirty="0">
+                <a:solidFill>
+                  <a:srgbClr val="FFFFFF"/>
                 </a:solidFill>
                 <a:latin typeface="Trebuchet MS" pitchFamily="34" charset="0"/>
                 <a:ea typeface="Trebuchet MS" pitchFamily="34" charset="-122"/>
                 <a:cs typeface="Trebuchet MS" pitchFamily="34" charset="-120"/>
               </a:rPr>
-              <a:t>Can We Predict Tomorrow's Price?</a:t>
-            </a:r>
-            <a:endParaRPr lang="en-US" sz="2400" dirty="0"/>
-          </a:p>
-        </p:txBody>
-      </p:sp>
-      <p:pic>
-        <p:nvPicPr>
-          <p:cNvPr id="4" name="Image 0" descr="preencoded.png"/>
-          <p:cNvPicPr>
-            <a:picLocks noChangeAspect="1"/>
-          </p:cNvPicPr>
-          <p:nvPr/>
-        </p:nvPicPr>
-        <p:blipFill>
-          <a:blip r:embed="rId3"/>
-          <a:stretch>
-            <a:fillRect/>
-          </a:stretch>
-        </p:blipFill>
-        <p:spPr>
-          <a:xfrm>
-            <a:off x="91440" y="685800"/>
-            <a:ext cx="8961120" cy="1920240"/>
-          </a:xfrm>
-          <a:prstGeom prst="rect">
-            <a:avLst/>
-          </a:prstGeom>
-        </p:spPr>
-      </p:pic>
-      <p:pic>
-        <p:nvPicPr>
-          <p:cNvPr id="5" name="Image 1" descr="preencoded.png"/>
-          <p:cNvPicPr>
-            <a:picLocks noChangeAspect="1"/>
-          </p:cNvPicPr>
-          <p:nvPr/>
-        </p:nvPicPr>
-        <p:blipFill>
-          <a:blip r:embed="rId4"/>
-          <a:stretch>
-            <a:fillRect/>
-          </a:stretch>
-        </p:blipFill>
-        <p:spPr>
-          <a:xfrm>
-            <a:off x="457200" y="2697480"/>
-            <a:ext cx="5029200" cy="1645920"/>
-          </a:xfrm>
-          <a:prstGeom prst="rect">
-            <a:avLst/>
-          </a:prstGeom>
-        </p:spPr>
-      </p:pic>
-      <p:sp>
-        <p:nvSpPr>
-          <p:cNvPr id="6" name="Shape 2"/>
-          <p:cNvSpPr/>
-          <p:nvPr/>
-        </p:nvSpPr>
-        <p:spPr>
-          <a:xfrm>
-            <a:off x="5760720" y="2743200"/>
-            <a:ext cx="3108960" cy="2194560"/>
+              <a:t>The Full Picture</a:t>
+            </a:r>
+            <a:endParaRPr lang="en-US" sz="2600" dirty="0"/>
+          </a:p>
+        </p:txBody>
+      </p:sp>
+      <p:sp>
+        <p:nvSpPr>
+          <p:cNvPr id="4" name="Shape 2"/>
+          <p:cNvSpPr/>
+          <p:nvPr/>
+        </p:nvSpPr>
+        <p:spPr>
+          <a:xfrm>
+            <a:off x="457200" y="868680"/>
+            <a:ext cx="8229600" cy="777240"/>
           </a:xfrm>
           <a:prstGeom prst="rect">
             <a:avLst/>
           </a:prstGeom>
           <a:solidFill>
-            <a:srgbClr val="F0F9FF"/>
+            <a:srgbClr val="0D2847"/>
           </a:solidFill>
           <a:ln/>
-          <a:effectLst>
-            <a:outerShdw blurRad="76200" dist="25400" dir="8100000" algn="bl" rotWithShape="0">
-              <a:srgbClr val="000000">
-                <a:alpha val="12000"/>
-              </a:srgbClr>
-            </a:outerShdw>
-          </a:effectLst>
         </p:spPr>
         <p:txBody>
           <a:bodyPr/>
@@ -8338,14 +7264,68 @@
       </p:sp>
       <p:sp>
         <p:nvSpPr>
-          <p:cNvPr id="7" name="Text 3"/>
-          <p:cNvSpPr/>
-          <p:nvPr/>
-        </p:nvSpPr>
-        <p:spPr>
-          <a:xfrm>
-            <a:off x="5897880" y="2834640"/>
-            <a:ext cx="2834640" cy="274320"/>
+          <p:cNvPr id="5" name="Shape 3"/>
+          <p:cNvSpPr/>
+          <p:nvPr/>
+        </p:nvSpPr>
+        <p:spPr>
+          <a:xfrm>
+            <a:off x="457200" y="868680"/>
+            <a:ext cx="54864" cy="777240"/>
+          </a:xfrm>
+          <a:prstGeom prst="rect">
+            <a:avLst/>
+          </a:prstGeom>
+          <a:solidFill>
+            <a:srgbClr val="10B981"/>
+          </a:solidFill>
+          <a:ln/>
+        </p:spPr>
+        <p:txBody>
+          <a:bodyPr/>
+          <a:lstStyle/>
+          <a:p>
+            <a:endParaRPr lang="en-GB"/>
+          </a:p>
+        </p:txBody>
+      </p:sp>
+      <p:sp>
+        <p:nvSpPr>
+          <p:cNvPr id="6" name="Shape 4"/>
+          <p:cNvSpPr/>
+          <p:nvPr/>
+        </p:nvSpPr>
+        <p:spPr>
+          <a:xfrm>
+            <a:off x="640080" y="978408"/>
+            <a:ext cx="347472" cy="347472"/>
+          </a:xfrm>
+          <a:prstGeom prst="ellipse">
+            <a:avLst/>
+          </a:prstGeom>
+          <a:solidFill>
+            <a:srgbClr val="10B981"/>
+          </a:solidFill>
+          <a:ln/>
+        </p:spPr>
+        <p:txBody>
+          <a:bodyPr/>
+          <a:lstStyle/>
+          <a:p>
+            <a:endParaRPr lang="en-GB"/>
+          </a:p>
+        </p:txBody>
+      </p:sp>
+      <p:sp>
+        <p:nvSpPr>
+          <p:cNvPr id="7" name="Text 5"/>
+          <p:cNvSpPr/>
+          <p:nvPr/>
+        </p:nvSpPr>
+        <p:spPr>
+          <a:xfrm>
+            <a:off x="640080" y="978408"/>
+            <a:ext cx="347472" cy="347472"/>
           </a:xfrm>
           <a:prstGeom prst="rect">
             <a:avLst/>
@@ -8357,34 +7337,34 @@
           <a:bodyPr wrap="square" lIns="0" tIns="0" rIns="0" bIns="0" rtlCol="0" anchor="ctr"/>
           <a:lstStyle/>
           <a:p>
-            <a:pPr marL="0" indent="0">
-              <a:buNone/>
-            </a:pPr>
-            <a:r>
-              <a:rPr lang="en-US" sz="1300" b="1" dirty="0">
-                <a:solidFill>
-                  <a:srgbClr val="1E293B"/>
+            <a:pPr marL="0" indent="0" algn="ctr">
+              <a:buNone/>
+            </a:pPr>
+            <a:r>
+              <a:rPr lang="en-US" sz="1500" b="1" dirty="0">
+                <a:solidFill>
+                  <a:srgbClr val="FFFFFF"/>
                 </a:solidFill>
                 <a:latin typeface="Trebuchet MS" pitchFamily="34" charset="0"/>
                 <a:ea typeface="Trebuchet MS" pitchFamily="34" charset="-122"/>
                 <a:cs typeface="Trebuchet MS" pitchFamily="34" charset="-120"/>
               </a:rPr>
-              <a:t>Honest Assessment</a:t>
-            </a:r>
-            <a:endParaRPr lang="en-US" sz="1300" dirty="0"/>
-          </a:p>
-        </p:txBody>
-      </p:sp>
-      <p:sp>
-        <p:nvSpPr>
-          <p:cNvPr id="8" name="Text 4"/>
-          <p:cNvSpPr/>
-          <p:nvPr/>
-        </p:nvSpPr>
-        <p:spPr>
-          <a:xfrm>
-            <a:off x="5897880" y="3154680"/>
-            <a:ext cx="2834640" cy="1737360"/>
+              <a:t>1</a:t>
+            </a:r>
+            <a:endParaRPr lang="en-US" sz="1500" dirty="0"/>
+          </a:p>
+        </p:txBody>
+      </p:sp>
+      <p:sp>
+        <p:nvSpPr>
+          <p:cNvPr id="8" name="Text 6"/>
+          <p:cNvSpPr/>
+          <p:nvPr/>
+        </p:nvSpPr>
+        <p:spPr>
+          <a:xfrm>
+            <a:off x="1143000" y="932688"/>
+            <a:ext cx="7315200" cy="274320"/>
           </a:xfrm>
           <a:prstGeom prst="rect">
             <a:avLst/>
@@ -8396,88 +7376,705 @@
           <a:bodyPr wrap="square" lIns="0" tIns="0" rIns="0" bIns="0" rtlCol="0" anchor="ctr"/>
           <a:lstStyle/>
           <a:p>
-            <a:pPr marL="342900" indent="-342900">
-              <a:spcAft>
-                <a:spcPts val="600"/>
-              </a:spcAft>
-              <a:buSzPct val="100000"/>
-              <a:buChar char="•"/>
-            </a:pPr>
-            <a:r>
-              <a:rPr lang="en-US" sz="950" dirty="0">
-                <a:solidFill>
-                  <a:srgbClr val="1E293B"/>
+            <a:pPr marL="0" indent="0">
+              <a:buNone/>
+            </a:pPr>
+            <a:r>
+              <a:rPr lang="en-US" sz="1400" b="1" dirty="0">
+                <a:solidFill>
+                  <a:srgbClr val="10B981"/>
+                </a:solidFill>
+                <a:latin typeface="Trebuchet MS" pitchFamily="34" charset="0"/>
+                <a:ea typeface="Trebuchet MS" pitchFamily="34" charset="-122"/>
+                <a:cs typeface="Trebuchet MS" pitchFamily="34" charset="-120"/>
+              </a:rPr>
+              <a:t>The growth is real</a:t>
+            </a:r>
+            <a:endParaRPr lang="en-US" sz="1400" dirty="0"/>
+          </a:p>
+        </p:txBody>
+      </p:sp>
+      <p:sp>
+        <p:nvSpPr>
+          <p:cNvPr id="9" name="Text 7"/>
+          <p:cNvSpPr/>
+          <p:nvPr/>
+        </p:nvSpPr>
+        <p:spPr>
+          <a:xfrm>
+            <a:off x="1143000" y="1234440"/>
+            <a:ext cx="7315200" cy="365760"/>
+          </a:xfrm>
+          <a:prstGeom prst="rect">
+            <a:avLst/>
+          </a:prstGeom>
+          <a:noFill/>
+          <a:ln/>
+        </p:spPr>
+        <p:txBody>
+          <a:bodyPr wrap="square" lIns="0" tIns="0" rIns="0" bIns="0" rtlCol="0" anchor="ctr"/>
+          <a:lstStyle/>
+          <a:p>
+            <a:pPr marL="0" indent="0">
+              <a:buNone/>
+            </a:pPr>
+            <a:r>
+              <a:rPr lang="en-US" sz="1050" dirty="0">
+                <a:solidFill>
+                  <a:srgbClr val="E2E8F0"/>
                 </a:solidFill>
                 <a:latin typeface="Calibri" pitchFamily="34" charset="0"/>
                 <a:ea typeface="Calibri" pitchFamily="34" charset="-122"/>
                 <a:cs typeface="Calibri" pitchFamily="34" charset="-120"/>
               </a:rPr>
-              <a:t>R² scores look great (0.97+), but that's partly because we use yesterday's price to predict today's</a:t>
-            </a:r>
-            <a:endParaRPr lang="en-US" sz="950" dirty="0"/>
-          </a:p>
-          <a:p>
-            <a:pPr marL="342900" indent="-342900">
-              <a:spcAft>
-                <a:spcPts val="600"/>
-              </a:spcAft>
-              <a:buSzPct val="100000"/>
-              <a:buChar char="•"/>
-            </a:pPr>
-            <a:r>
-              <a:rPr lang="en-US" sz="950" dirty="0">
-                <a:solidFill>
-                  <a:srgbClr val="1E293B"/>
+              <a:t>All 5 tested stocks rejected H₀, their upward trends are statistically significant, not random luck.</a:t>
+            </a:r>
+            <a:endParaRPr lang="en-US" sz="1050" dirty="0"/>
+          </a:p>
+        </p:txBody>
+      </p:sp>
+      <p:sp>
+        <p:nvSpPr>
+          <p:cNvPr id="10" name="Shape 8"/>
+          <p:cNvSpPr/>
+          <p:nvPr/>
+        </p:nvSpPr>
+        <p:spPr>
+          <a:xfrm>
+            <a:off x="457200" y="1783080"/>
+            <a:ext cx="8229600" cy="777240"/>
+          </a:xfrm>
+          <a:prstGeom prst="rect">
+            <a:avLst/>
+          </a:prstGeom>
+          <a:solidFill>
+            <a:srgbClr val="0D2847"/>
+          </a:solidFill>
+          <a:ln/>
+        </p:spPr>
+        <p:txBody>
+          <a:bodyPr/>
+          <a:lstStyle/>
+          <a:p>
+            <a:endParaRPr lang="en-GB"/>
+          </a:p>
+        </p:txBody>
+      </p:sp>
+      <p:sp>
+        <p:nvSpPr>
+          <p:cNvPr id="11" name="Shape 9"/>
+          <p:cNvSpPr/>
+          <p:nvPr/>
+        </p:nvSpPr>
+        <p:spPr>
+          <a:xfrm>
+            <a:off x="457200" y="1783080"/>
+            <a:ext cx="54864" cy="777240"/>
+          </a:xfrm>
+          <a:prstGeom prst="rect">
+            <a:avLst/>
+          </a:prstGeom>
+          <a:solidFill>
+            <a:srgbClr val="0891B2"/>
+          </a:solidFill>
+          <a:ln/>
+        </p:spPr>
+        <p:txBody>
+          <a:bodyPr/>
+          <a:lstStyle/>
+          <a:p>
+            <a:endParaRPr lang="en-GB"/>
+          </a:p>
+        </p:txBody>
+      </p:sp>
+      <p:sp>
+        <p:nvSpPr>
+          <p:cNvPr id="12" name="Shape 10"/>
+          <p:cNvSpPr/>
+          <p:nvPr/>
+        </p:nvSpPr>
+        <p:spPr>
+          <a:xfrm>
+            <a:off x="640080" y="1892808"/>
+            <a:ext cx="347472" cy="347472"/>
+          </a:xfrm>
+          <a:prstGeom prst="ellipse">
+            <a:avLst/>
+          </a:prstGeom>
+          <a:solidFill>
+            <a:srgbClr val="0891B2"/>
+          </a:solidFill>
+          <a:ln/>
+        </p:spPr>
+        <p:txBody>
+          <a:bodyPr/>
+          <a:lstStyle/>
+          <a:p>
+            <a:endParaRPr lang="en-GB"/>
+          </a:p>
+        </p:txBody>
+      </p:sp>
+      <p:sp>
+        <p:nvSpPr>
+          <p:cNvPr id="13" name="Text 11"/>
+          <p:cNvSpPr/>
+          <p:nvPr/>
+        </p:nvSpPr>
+        <p:spPr>
+          <a:xfrm>
+            <a:off x="640080" y="1892808"/>
+            <a:ext cx="347472" cy="347472"/>
+          </a:xfrm>
+          <a:prstGeom prst="rect">
+            <a:avLst/>
+          </a:prstGeom>
+          <a:noFill/>
+          <a:ln/>
+        </p:spPr>
+        <p:txBody>
+          <a:bodyPr wrap="square" lIns="0" tIns="0" rIns="0" bIns="0" rtlCol="0" anchor="ctr"/>
+          <a:lstStyle/>
+          <a:p>
+            <a:pPr marL="0" indent="0" algn="ctr">
+              <a:buNone/>
+            </a:pPr>
+            <a:r>
+              <a:rPr lang="en-US" sz="1500" b="1" dirty="0">
+                <a:solidFill>
+                  <a:srgbClr val="FFFFFF"/>
+                </a:solidFill>
+                <a:latin typeface="Trebuchet MS" pitchFamily="34" charset="0"/>
+                <a:ea typeface="Trebuchet MS" pitchFamily="34" charset="-122"/>
+                <a:cs typeface="Trebuchet MS" pitchFamily="34" charset="-120"/>
+              </a:rPr>
+              <a:t>2</a:t>
+            </a:r>
+            <a:endParaRPr lang="en-US" sz="1500" dirty="0"/>
+          </a:p>
+        </p:txBody>
+      </p:sp>
+      <p:sp>
+        <p:nvSpPr>
+          <p:cNvPr id="14" name="Text 12"/>
+          <p:cNvSpPr/>
+          <p:nvPr/>
+        </p:nvSpPr>
+        <p:spPr>
+          <a:xfrm>
+            <a:off x="1143000" y="1847088"/>
+            <a:ext cx="7315200" cy="274320"/>
+          </a:xfrm>
+          <a:prstGeom prst="rect">
+            <a:avLst/>
+          </a:prstGeom>
+          <a:noFill/>
+          <a:ln/>
+        </p:spPr>
+        <p:txBody>
+          <a:bodyPr wrap="square" lIns="0" tIns="0" rIns="0" bIns="0" rtlCol="0" anchor="ctr"/>
+          <a:lstStyle/>
+          <a:p>
+            <a:pPr marL="0" indent="0">
+              <a:buNone/>
+            </a:pPr>
+            <a:r>
+              <a:rPr lang="en-US" sz="1400" b="1" dirty="0">
+                <a:solidFill>
+                  <a:srgbClr val="0891B2"/>
+                </a:solidFill>
+                <a:latin typeface="Trebuchet MS" pitchFamily="34" charset="0"/>
+                <a:ea typeface="Trebuchet MS" pitchFamily="34" charset="-122"/>
+                <a:cs typeface="Trebuchet MS" pitchFamily="34" charset="-120"/>
+              </a:rPr>
+              <a:t>The whole market moves together</a:t>
+            </a:r>
+            <a:endParaRPr lang="en-US" sz="1400" dirty="0"/>
+          </a:p>
+        </p:txBody>
+      </p:sp>
+      <p:sp>
+        <p:nvSpPr>
+          <p:cNvPr id="15" name="Text 13"/>
+          <p:cNvSpPr/>
+          <p:nvPr/>
+        </p:nvSpPr>
+        <p:spPr>
+          <a:xfrm>
+            <a:off x="1143000" y="2148840"/>
+            <a:ext cx="7315200" cy="365760"/>
+          </a:xfrm>
+          <a:prstGeom prst="rect">
+            <a:avLst/>
+          </a:prstGeom>
+          <a:noFill/>
+          <a:ln/>
+        </p:spPr>
+        <p:txBody>
+          <a:bodyPr wrap="square" lIns="0" tIns="0" rIns="0" bIns="0" rtlCol="0" anchor="ctr"/>
+          <a:lstStyle/>
+          <a:p>
+            <a:pPr marL="0" indent="0">
+              <a:buNone/>
+            </a:pPr>
+            <a:r>
+              <a:rPr lang="en-US" sz="1050" dirty="0">
+                <a:solidFill>
+                  <a:srgbClr val="E2E8F0"/>
                 </a:solidFill>
                 <a:latin typeface="Calibri" pitchFamily="34" charset="0"/>
                 <a:ea typeface="Calibri" pitchFamily="34" charset="-122"/>
                 <a:cs typeface="Calibri" pitchFamily="34" charset="-120"/>
               </a:rPr>
-              <a:t>The model tracks trends well but can't predict sudden crashes from devaluation events</a:t>
-            </a:r>
-            <a:endParaRPr lang="en-US" sz="950" dirty="0"/>
-          </a:p>
-          <a:p>
-            <a:pPr marL="342900" indent="-342900">
-              <a:spcAft>
-                <a:spcPts val="600"/>
-              </a:spcAft>
-              <a:buSzPct val="100000"/>
-              <a:buChar char="•"/>
-            </a:pPr>
-            <a:r>
-              <a:rPr lang="en-US" sz="950" dirty="0">
-                <a:solidFill>
-                  <a:srgbClr val="1E293B"/>
+              <a:t>No significant difference between sectors. When the Central Bank moves or the pound drops, every sector feels it equally.</a:t>
+            </a:r>
+            <a:endParaRPr lang="en-US" sz="1050" dirty="0"/>
+          </a:p>
+        </p:txBody>
+      </p:sp>
+      <p:sp>
+        <p:nvSpPr>
+          <p:cNvPr id="16" name="Shape 14"/>
+          <p:cNvSpPr/>
+          <p:nvPr/>
+        </p:nvSpPr>
+        <p:spPr>
+          <a:xfrm>
+            <a:off x="457200" y="2697480"/>
+            <a:ext cx="8229600" cy="777240"/>
+          </a:xfrm>
+          <a:prstGeom prst="rect">
+            <a:avLst/>
+          </a:prstGeom>
+          <a:solidFill>
+            <a:srgbClr val="0D2847"/>
+          </a:solidFill>
+          <a:ln/>
+        </p:spPr>
+        <p:txBody>
+          <a:bodyPr/>
+          <a:lstStyle/>
+          <a:p>
+            <a:endParaRPr lang="en-GB"/>
+          </a:p>
+        </p:txBody>
+      </p:sp>
+      <p:sp>
+        <p:nvSpPr>
+          <p:cNvPr id="17" name="Shape 15"/>
+          <p:cNvSpPr/>
+          <p:nvPr/>
+        </p:nvSpPr>
+        <p:spPr>
+          <a:xfrm>
+            <a:off x="457200" y="2697480"/>
+            <a:ext cx="54864" cy="777240"/>
+          </a:xfrm>
+          <a:prstGeom prst="rect">
+            <a:avLst/>
+          </a:prstGeom>
+          <a:solidFill>
+            <a:srgbClr val="EF4444"/>
+          </a:solidFill>
+          <a:ln/>
+        </p:spPr>
+        <p:txBody>
+          <a:bodyPr/>
+          <a:lstStyle/>
+          <a:p>
+            <a:endParaRPr lang="en-GB"/>
+          </a:p>
+        </p:txBody>
+      </p:sp>
+      <p:sp>
+        <p:nvSpPr>
+          <p:cNvPr id="18" name="Shape 16"/>
+          <p:cNvSpPr/>
+          <p:nvPr/>
+        </p:nvSpPr>
+        <p:spPr>
+          <a:xfrm>
+            <a:off x="640080" y="2807208"/>
+            <a:ext cx="347472" cy="347472"/>
+          </a:xfrm>
+          <a:prstGeom prst="ellipse">
+            <a:avLst/>
+          </a:prstGeom>
+          <a:solidFill>
+            <a:srgbClr val="EF4444"/>
+          </a:solidFill>
+          <a:ln/>
+        </p:spPr>
+        <p:txBody>
+          <a:bodyPr/>
+          <a:lstStyle/>
+          <a:p>
+            <a:endParaRPr lang="en-GB"/>
+          </a:p>
+        </p:txBody>
+      </p:sp>
+      <p:sp>
+        <p:nvSpPr>
+          <p:cNvPr id="19" name="Text 17"/>
+          <p:cNvSpPr/>
+          <p:nvPr/>
+        </p:nvSpPr>
+        <p:spPr>
+          <a:xfrm>
+            <a:off x="640080" y="2807208"/>
+            <a:ext cx="347472" cy="347472"/>
+          </a:xfrm>
+          <a:prstGeom prst="rect">
+            <a:avLst/>
+          </a:prstGeom>
+          <a:noFill/>
+          <a:ln/>
+        </p:spPr>
+        <p:txBody>
+          <a:bodyPr wrap="square" lIns="0" tIns="0" rIns="0" bIns="0" rtlCol="0" anchor="ctr"/>
+          <a:lstStyle/>
+          <a:p>
+            <a:pPr marL="0" indent="0" algn="ctr">
+              <a:buNone/>
+            </a:pPr>
+            <a:r>
+              <a:rPr lang="en-US" sz="1500" b="1" dirty="0">
+                <a:solidFill>
+                  <a:srgbClr val="FFFFFF"/>
+                </a:solidFill>
+                <a:latin typeface="Trebuchet MS" pitchFamily="34" charset="0"/>
+                <a:ea typeface="Trebuchet MS" pitchFamily="34" charset="-122"/>
+                <a:cs typeface="Trebuchet MS" pitchFamily="34" charset="-120"/>
+              </a:rPr>
+              <a:t>3</a:t>
+            </a:r>
+            <a:endParaRPr lang="en-US" sz="1500" dirty="0"/>
+          </a:p>
+        </p:txBody>
+      </p:sp>
+      <p:sp>
+        <p:nvSpPr>
+          <p:cNvPr id="20" name="Text 18"/>
+          <p:cNvSpPr/>
+          <p:nvPr/>
+        </p:nvSpPr>
+        <p:spPr>
+          <a:xfrm>
+            <a:off x="1143000" y="2761488"/>
+            <a:ext cx="7315200" cy="274320"/>
+          </a:xfrm>
+          <a:prstGeom prst="rect">
+            <a:avLst/>
+          </a:prstGeom>
+          <a:noFill/>
+          <a:ln/>
+        </p:spPr>
+        <p:txBody>
+          <a:bodyPr wrap="square" lIns="0" tIns="0" rIns="0" bIns="0" rtlCol="0" anchor="ctr"/>
+          <a:lstStyle/>
+          <a:p>
+            <a:pPr marL="0" indent="0">
+              <a:buNone/>
+            </a:pPr>
+            <a:r>
+              <a:rPr lang="en-US" sz="1400" b="1" dirty="0">
+                <a:solidFill>
+                  <a:srgbClr val="EF4444"/>
+                </a:solidFill>
+                <a:latin typeface="Trebuchet MS" pitchFamily="34" charset="0"/>
+                <a:ea typeface="Trebuchet MS" pitchFamily="34" charset="-122"/>
+                <a:cs typeface="Trebuchet MS" pitchFamily="34" charset="-120"/>
+              </a:rPr>
+              <a:t>Devaluations hit everyone</a:t>
+            </a:r>
+            <a:endParaRPr lang="en-US" sz="1400" dirty="0"/>
+          </a:p>
+        </p:txBody>
+      </p:sp>
+      <p:sp>
+        <p:nvSpPr>
+          <p:cNvPr id="21" name="Text 19"/>
+          <p:cNvSpPr/>
+          <p:nvPr/>
+        </p:nvSpPr>
+        <p:spPr>
+          <a:xfrm>
+            <a:off x="1143000" y="3063240"/>
+            <a:ext cx="7315200" cy="365760"/>
+          </a:xfrm>
+          <a:prstGeom prst="rect">
+            <a:avLst/>
+          </a:prstGeom>
+          <a:noFill/>
+          <a:ln/>
+        </p:spPr>
+        <p:txBody>
+          <a:bodyPr wrap="square" lIns="0" tIns="0" rIns="0" bIns="0" rtlCol="0" anchor="ctr"/>
+          <a:lstStyle/>
+          <a:p>
+            <a:pPr marL="0" indent="0">
+              <a:buNone/>
+            </a:pPr>
+            <a:r>
+              <a:rPr lang="en-US" sz="1050" dirty="0">
+                <a:solidFill>
+                  <a:srgbClr val="E2E8F0"/>
                 </a:solidFill>
                 <a:latin typeface="Calibri" pitchFamily="34" charset="0"/>
                 <a:ea typeface="Calibri" pitchFamily="34" charset="-122"/>
                 <a:cs typeface="Calibri" pitchFamily="34" charset="-120"/>
               </a:rPr>
-              <a:t>RMSE tells the real story, error is bigger for expensive stocks (COMI, SWDY)</a:t>
-            </a:r>
-            <a:endParaRPr lang="en-US" sz="950" dirty="0"/>
-          </a:p>
-          <a:p>
-            <a:pPr marL="342900" indent="-342900">
-              <a:spcAft>
-                <a:spcPts val="600"/>
-              </a:spcAft>
-              <a:buSzPct val="100000"/>
-              <a:buChar char="•"/>
-            </a:pPr>
-            <a:r>
-              <a:rPr lang="en-US" sz="950" dirty="0">
-                <a:solidFill>
-                  <a:srgbClr val="1E293B"/>
+              <a:t>All three EGP devaluations caused volatility spikes across all stocks. Jan 2024 was the biggest shock, daily swings doubled overnight.</a:t>
+            </a:r>
+            <a:endParaRPr lang="en-US" sz="1050" dirty="0"/>
+          </a:p>
+        </p:txBody>
+      </p:sp>
+      <p:sp>
+        <p:nvSpPr>
+          <p:cNvPr id="22" name="Shape 20"/>
+          <p:cNvSpPr/>
+          <p:nvPr/>
+        </p:nvSpPr>
+        <p:spPr>
+          <a:xfrm>
+            <a:off x="457200" y="3611880"/>
+            <a:ext cx="8229600" cy="777240"/>
+          </a:xfrm>
+          <a:prstGeom prst="rect">
+            <a:avLst/>
+          </a:prstGeom>
+          <a:solidFill>
+            <a:srgbClr val="0D2847"/>
+          </a:solidFill>
+          <a:ln/>
+        </p:spPr>
+        <p:txBody>
+          <a:bodyPr/>
+          <a:lstStyle/>
+          <a:p>
+            <a:endParaRPr lang="en-GB"/>
+          </a:p>
+        </p:txBody>
+      </p:sp>
+      <p:sp>
+        <p:nvSpPr>
+          <p:cNvPr id="23" name="Shape 21"/>
+          <p:cNvSpPr/>
+          <p:nvPr/>
+        </p:nvSpPr>
+        <p:spPr>
+          <a:xfrm>
+            <a:off x="457200" y="3611880"/>
+            <a:ext cx="54864" cy="777240"/>
+          </a:xfrm>
+          <a:prstGeom prst="rect">
+            <a:avLst/>
+          </a:prstGeom>
+          <a:solidFill>
+            <a:srgbClr val="F59E0B"/>
+          </a:solidFill>
+          <a:ln/>
+        </p:spPr>
+        <p:txBody>
+          <a:bodyPr/>
+          <a:lstStyle/>
+          <a:p>
+            <a:endParaRPr lang="en-GB"/>
+          </a:p>
+        </p:txBody>
+      </p:sp>
+      <p:sp>
+        <p:nvSpPr>
+          <p:cNvPr id="24" name="Shape 22"/>
+          <p:cNvSpPr/>
+          <p:nvPr/>
+        </p:nvSpPr>
+        <p:spPr>
+          <a:xfrm>
+            <a:off x="640080" y="3721608"/>
+            <a:ext cx="347472" cy="347472"/>
+          </a:xfrm>
+          <a:prstGeom prst="ellipse">
+            <a:avLst/>
+          </a:prstGeom>
+          <a:solidFill>
+            <a:srgbClr val="F59E0B"/>
+          </a:solidFill>
+          <a:ln/>
+        </p:spPr>
+        <p:txBody>
+          <a:bodyPr/>
+          <a:lstStyle/>
+          <a:p>
+            <a:endParaRPr lang="en-GB"/>
+          </a:p>
+        </p:txBody>
+      </p:sp>
+      <p:sp>
+        <p:nvSpPr>
+          <p:cNvPr id="25" name="Text 23"/>
+          <p:cNvSpPr/>
+          <p:nvPr/>
+        </p:nvSpPr>
+        <p:spPr>
+          <a:xfrm>
+            <a:off x="640080" y="3721608"/>
+            <a:ext cx="347472" cy="347472"/>
+          </a:xfrm>
+          <a:prstGeom prst="rect">
+            <a:avLst/>
+          </a:prstGeom>
+          <a:noFill/>
+          <a:ln/>
+        </p:spPr>
+        <p:txBody>
+          <a:bodyPr wrap="square" lIns="0" tIns="0" rIns="0" bIns="0" rtlCol="0" anchor="ctr"/>
+          <a:lstStyle/>
+          <a:p>
+            <a:pPr marL="0" indent="0" algn="ctr">
+              <a:buNone/>
+            </a:pPr>
+            <a:r>
+              <a:rPr lang="en-US" sz="1500" b="1" dirty="0">
+                <a:solidFill>
+                  <a:srgbClr val="FFFFFF"/>
+                </a:solidFill>
+                <a:latin typeface="Trebuchet MS" pitchFamily="34" charset="0"/>
+                <a:ea typeface="Trebuchet MS" pitchFamily="34" charset="-122"/>
+                <a:cs typeface="Trebuchet MS" pitchFamily="34" charset="-120"/>
+              </a:rPr>
+              <a:t>4</a:t>
+            </a:r>
+            <a:endParaRPr lang="en-US" sz="1500" dirty="0"/>
+          </a:p>
+        </p:txBody>
+      </p:sp>
+      <p:sp>
+        <p:nvSpPr>
+          <p:cNvPr id="26" name="Text 24"/>
+          <p:cNvSpPr/>
+          <p:nvPr/>
+        </p:nvSpPr>
+        <p:spPr>
+          <a:xfrm>
+            <a:off x="1143000" y="3675888"/>
+            <a:ext cx="7315200" cy="274320"/>
+          </a:xfrm>
+          <a:prstGeom prst="rect">
+            <a:avLst/>
+          </a:prstGeom>
+          <a:noFill/>
+          <a:ln/>
+        </p:spPr>
+        <p:txBody>
+          <a:bodyPr wrap="square" lIns="0" tIns="0" rIns="0" bIns="0" rtlCol="0" anchor="ctr"/>
+          <a:lstStyle/>
+          <a:p>
+            <a:pPr marL="0" indent="0">
+              <a:buNone/>
+            </a:pPr>
+            <a:r>
+              <a:rPr lang="en-US" sz="1400" b="1" dirty="0">
+                <a:solidFill>
+                  <a:srgbClr val="F59E0B"/>
+                </a:solidFill>
+                <a:latin typeface="Trebuchet MS" pitchFamily="34" charset="0"/>
+              </a:rPr>
+              <a:t>It’s all about the economy</a:t>
+            </a:r>
+            <a:endParaRPr lang="en-US" sz="1400" dirty="0"/>
+          </a:p>
+        </p:txBody>
+      </p:sp>
+      <p:sp>
+        <p:nvSpPr>
+          <p:cNvPr id="27" name="Text 25"/>
+          <p:cNvSpPr/>
+          <p:nvPr/>
+        </p:nvSpPr>
+        <p:spPr>
+          <a:xfrm>
+            <a:off x="1143000" y="3977640"/>
+            <a:ext cx="7315200" cy="365760"/>
+          </a:xfrm>
+          <a:prstGeom prst="rect">
+            <a:avLst/>
+          </a:prstGeom>
+          <a:noFill/>
+          <a:ln/>
+        </p:spPr>
+        <p:txBody>
+          <a:bodyPr wrap="square" lIns="0" tIns="0" rIns="0" bIns="0" rtlCol="0" anchor="ctr"/>
+          <a:lstStyle/>
+          <a:p>
+            <a:r>
+              <a:rPr lang="en-GB" sz="1050" dirty="0">
+                <a:solidFill>
+                  <a:schemeClr val="bg1"/>
+                </a:solidFill>
+              </a:rPr>
+              <a:t>EGP</a:t>
+            </a:r>
+            <a:r>
+              <a:rPr lang="en-GB" sz="1050" dirty="0"/>
+              <a:t> </a:t>
+            </a:r>
+            <a:r>
+              <a:rPr lang="en-GB" sz="1050" dirty="0">
+                <a:solidFill>
+                  <a:schemeClr val="bg1"/>
+                </a:solidFill>
+              </a:rPr>
+              <a:t>devaluations, inflation, and Central Bank policy are the real drivers, they explain both why stocks grew and why they all grew together.</a:t>
+            </a:r>
+            <a:endParaRPr lang="en-US" sz="1050" dirty="0">
+              <a:solidFill>
+                <a:schemeClr val="bg1"/>
+              </a:solidFill>
+            </a:endParaRPr>
+          </a:p>
+        </p:txBody>
+      </p:sp>
+      <p:sp>
+        <p:nvSpPr>
+          <p:cNvPr id="28" name="Text 26"/>
+          <p:cNvSpPr/>
+          <p:nvPr/>
+        </p:nvSpPr>
+        <p:spPr>
+          <a:xfrm>
+            <a:off x="457200" y="4498848"/>
+            <a:ext cx="8306114" cy="521208"/>
+          </a:xfrm>
+          <a:prstGeom prst="rect">
+            <a:avLst/>
+          </a:prstGeom>
+          <a:noFill/>
+          <a:ln/>
+        </p:spPr>
+        <p:txBody>
+          <a:bodyPr wrap="square" lIns="0" tIns="0" rIns="0" bIns="0" rtlCol="0" anchor="ctr"/>
+          <a:lstStyle/>
+          <a:p>
+            <a:pPr marL="0" indent="0">
+              <a:buNone/>
+            </a:pPr>
+            <a:r>
+              <a:rPr lang="en-US" sz="1000" i="1" dirty="0">
+                <a:solidFill>
+                  <a:schemeClr val="bg1"/>
                 </a:solidFill>
                 <a:latin typeface="Calibri" pitchFamily="34" charset="0"/>
                 <a:ea typeface="Calibri" pitchFamily="34" charset="-122"/>
                 <a:cs typeface="Calibri" pitchFamily="34" charset="-120"/>
               </a:rPr>
-              <a:t>It's a useful baseline, but real prediction needs news data, volume shocks, and non-linear models</a:t>
-            </a:r>
-            <a:endParaRPr lang="en-US" sz="950" dirty="0"/>
+              <a:t>Bottom line: understanding macro events - especially currency policy - matters more than any technical indicator for navigating the Egyptian market.</a:t>
+            </a:r>
+            <a:endParaRPr lang="en-US" sz="1000" dirty="0">
+              <a:solidFill>
+                <a:schemeClr val="bg1"/>
+              </a:solidFill>
+            </a:endParaRPr>
           </a:p>
         </p:txBody>
       </p:sp>
